--- a/02주차/경사하강법,역전파.pptx
+++ b/02주차/경사하강법,역전파.pptx
@@ -36,8 +36,11 @@
     <p:sldId id="273" r:id="rId30"/>
     <p:sldId id="281" r:id="rId31"/>
     <p:sldId id="283" r:id="rId32"/>
-    <p:sldId id="284" r:id="rId33"/>
-    <p:sldId id="275" r:id="rId34"/>
+    <p:sldId id="310" r:id="rId33"/>
+    <p:sldId id="311" r:id="rId34"/>
+    <p:sldId id="284" r:id="rId35"/>
+    <p:sldId id="309" r:id="rId36"/>
+    <p:sldId id="275" r:id="rId37"/>
   </p:sldIdLst>
   <p:sldSz cx="12192000" cy="6858000"/>
   <p:notesSz cx="6858000" cy="9144000"/>
@@ -928,6 +931,146 @@
 </inkml:ink>
 </file>
 
+<file path=ppt/ink/ink35.xml><?xml version="1.0" encoding="utf-8"?>
+<inkml:ink xmlns:inkml="http://www.w3.org/2003/InkML">
+  <inkml:definitions>
+    <inkml:context xml:id="ctx0">
+      <inkml:inkSource xml:id="inkSrc0">
+        <inkml:traceFormat>
+          <inkml:channel name="X" type="integer" min="-2.14748E9" max="2.14748E9" units="cm"/>
+          <inkml:channel name="Y" type="integer" min="-2.14748E9" max="2.14748E9" units="cm"/>
+          <inkml:channel name="F" type="integer" max="32767" units="dev"/>
+        </inkml:traceFormat>
+        <inkml:channelProperties>
+          <inkml:channelProperty channel="X" name="resolution" value="1000" units="1/cm"/>
+          <inkml:channelProperty channel="Y" name="resolution" value="1000" units="1/cm"/>
+          <inkml:channelProperty channel="F" name="resolution" value="0" units="1/dev"/>
+        </inkml:channelProperties>
+      </inkml:inkSource>
+      <inkml:timestamp xml:id="ts0" timeString="2026-02-12T19:07:40.920"/>
+    </inkml:context>
+    <inkml:brush xml:id="br0">
+      <inkml:brushProperty name="width" value="0.035" units="cm"/>
+      <inkml:brushProperty name="height" value="0.035" units="cm"/>
+      <inkml:brushProperty name="color" value="#E71224"/>
+    </inkml:brush>
+  </inkml:definitions>
+  <inkml:trace contextRef="#ctx0" brushRef="#br0">1281 641 24516,'0'25'0,"-2"0"0,0 0 0,-2 0 0,0-1 0,-2 1 0,0-1 0,-1 0 0,-2 0 0,0 0 0,-1-1 0,-1-1 0,-1 0 0,0 0 0,-2-1 0,0 0 0,-2-1 0,1-1 0,-2 0 0,-1-1 0,0 0 0,-1-1 0,0-2 0,-1 1 0,-1-2 0,0 0 0,-1-2 0,0 0 0,0-1 0,-1-1 0,-1-1 0,0 0 0,0-2 0,0-1 0,-1 0 0,1-2 0,-1 0 0,0-2 0,0 0 0,0-2 0,-1 0 0,1-2 0,0 0 0,0-2 0,1 0 0,-1-2 0,1 0 0,0-1 0,0-2 0,0 0 0,1-1 0,1-1 0,0-1 0,0 0 0,1-2 0,0 0 0,1-2 0,1 1 0,0-2 0,1-1 0,0 0 0,1-1 0,2 0 0,-1-1 0,2-1 0,0 0 0,2-1 0,0 0 0,1 0 0,1-1 0,1-1 0,0 0 0,2 0 0,1 0 0,0-1 0,2 1 0,0-1 0,2 0 0,0 0 0,2 0 0,0-1 0,2 1 0,0 0 0,2 0 0,0 1 0,2-1 0,0 1 0,1 0 0,2 0 0,0 0 0,1 1 0,1 1 0,1 0 0,0 0 0,2 1 0,0 0 0,2 1 0,-1 1 0,2 0 0,1 1 0,0 0 0,1 1 0,0 2 0,1-1 0,1 2 0,0 0 0,1 2 0,0 0 0,0 1 0,1 1 0,1 1 0,0 0 0,0 2 0,0 1 0,1 0 0,-1 2 0,1 0 0,0 2 0,0 0 0,1 2 0,-1 0 0,0 2 0,0 0 0,0 2 0,-1 0 0,1 2 0,-1 0 0,0 1 0,0 2 0,0 0 0,-1 1 0,-1 1 0,0 1 0,0 0 0,-1 2 0,0 0 0,-1 2 0,-1-1 0,0 2 0,-1 1 0,0 0 0,-1 1 0,-2 0 0,1 1 0,-2 1 0,0 0 0,-2 1 0,0 0 0,-1 0 0,-1 1 0,-1 1 0,0 0 0,-2 0 0,-1 0 0,0 1 0,-2-1 0,0 1 0,-2 0 0,0 0 0,-2 1 0</inkml:trace>
+</inkml:ink>
+</file>
+
+<file path=ppt/ink/ink36.xml><?xml version="1.0" encoding="utf-8"?>
+<inkml:ink xmlns:inkml="http://www.w3.org/2003/InkML">
+  <inkml:definitions>
+    <inkml:context xml:id="ctx0">
+      <inkml:inkSource xml:id="inkSrc0">
+        <inkml:traceFormat>
+          <inkml:channel name="X" type="integer" min="-2.14748E9" max="2.14748E9" units="cm"/>
+          <inkml:channel name="Y" type="integer" min="-2.14748E9" max="2.14748E9" units="cm"/>
+          <inkml:channel name="F" type="integer" max="32767" units="dev"/>
+        </inkml:traceFormat>
+        <inkml:channelProperties>
+          <inkml:channelProperty channel="X" name="resolution" value="1000" units="1/cm"/>
+          <inkml:channelProperty channel="Y" name="resolution" value="1000" units="1/cm"/>
+          <inkml:channelProperty channel="F" name="resolution" value="0" units="1/dev"/>
+        </inkml:channelProperties>
+      </inkml:inkSource>
+      <inkml:timestamp xml:id="ts0" timeString="2026-02-12T19:07:44.421"/>
+    </inkml:context>
+    <inkml:brush xml:id="br0">
+      <inkml:brushProperty name="width" value="0.035" units="cm"/>
+      <inkml:brushProperty name="height" value="0.035" units="cm"/>
+      <inkml:brushProperty name="color" value="#E71224"/>
+    </inkml:brush>
+  </inkml:definitions>
+  <inkml:trace contextRef="#ctx0" brushRef="#br0">632 0 24575,'4'1'0,"0"-1"0,0 1 0,0 0 0,0 0 0,0 0 0,0 0 0,0 1 0,0 0 0,-1-1 0,1 1 0,-1 1 0,1-1 0,-1 0 0,0 1 0,5 4 0,43 56 0,-14-16 0,301 268 0,-195-177 0,-71-64 0,-33-28 0,-30-34 0,0-1 0,1 0 0,13 11 0,10 11 0,-1 1 0,45 62 0,-57-66 0,-1 0 0,18 41 0,19 31 0,-40-72 0,23 51 0,8 16 0,-34-71 0,-1 0 0,15 47 0,-17-43 0,1 0 0,16 28 0,-21-44 0,-1 0 0,0 1 0,-1-1 0,0 1 0,-2-1 0,1 1 0,-1 23 0,9 44 0,1-20 0,-7-33 0,1-1 0,16 44 0,-16-50 0,0 0 0,-1 1 0,4 39 0,0 4 0,28 172 0,-12-104 0,-9-2 0,-4-54 0,0-6 0,-7-47 0,-1 1 0,1 36 0,-5-30 0,1-1 0,1 1 0,10 44 0,-6-41 0,-2 1 0,-1 1 0,-2-1 0,-4 46 0,0-31 0,6 57 0,10-36 0,-9-53 0,0 0 0,2 30 0,-7 296 0,0-326 0,-2 1 0,0-1 0,-1 0 0,-1 0 0,-9 24 0,-8 28 0,17-53 0,-1 0 0,-1-1 0,-15 25 0,5-6 0,-9 13 0,-35 52 0,-42 35 0,88-121 0,-1 0 0,-29 20 0,0 1 0,4-4 0,-60 36 0,57-40 0,-53 44 0,21-8 0,-106 100 0,109-102 0,10-11 0,28-17 0,1 2 0,2 1 0,-34 52 0,-34 41 0,1-2 0,57-71 0,-59 61 0,-3 3 0,77-79 0,22-33 0,-1 1 0,0-1 0,-1 0 0,-12 13 0,1-4 0,2 0 0,-20 29 0,7-9 0,-62 65 0,-81 119 0,163-208-273,0-1 0,2 1 0,0 1 0,-7 17 0,9-15-6553</inkml:trace>
+</inkml:ink>
+</file>
+
+<file path=ppt/ink/ink37.xml><?xml version="1.0" encoding="utf-8"?>
+<inkml:ink xmlns:inkml="http://www.w3.org/2003/InkML">
+  <inkml:definitions>
+    <inkml:context xml:id="ctx0">
+      <inkml:inkSource xml:id="inkSrc0">
+        <inkml:traceFormat>
+          <inkml:channel name="X" type="integer" min="-2.14748E9" max="2.14748E9" units="cm"/>
+          <inkml:channel name="Y" type="integer" min="-2.14748E9" max="2.14748E9" units="cm"/>
+          <inkml:channel name="F" type="integer" max="32767" units="dev"/>
+        </inkml:traceFormat>
+        <inkml:channelProperties>
+          <inkml:channelProperty channel="X" name="resolution" value="1000" units="1/cm"/>
+          <inkml:channelProperty channel="Y" name="resolution" value="1000" units="1/cm"/>
+          <inkml:channelProperty channel="F" name="resolution" value="0" units="1/dev"/>
+        </inkml:channelProperties>
+      </inkml:inkSource>
+      <inkml:timestamp xml:id="ts0" timeString="2026-02-12T19:07:45.520"/>
+    </inkml:context>
+    <inkml:brush xml:id="br0">
+      <inkml:brushProperty name="width" value="0.035" units="cm"/>
+      <inkml:brushProperty name="height" value="0.035" units="cm"/>
+      <inkml:brushProperty name="color" value="#E71224"/>
+    </inkml:brush>
+  </inkml:definitions>
+  <inkml:trace contextRef="#ctx0" brushRef="#br0">29 0 24575,'-1'1'0,"0"-1"0,0 1 0,-1-1 0,1 1 0,0-1 0,0 1 0,0 0 0,0 0 0,0-1 0,0 1 0,0 0 0,0 0 0,1 0 0,-1 0 0,0 0 0,0 0 0,1 0 0,-1 0 0,1 0 0,-1 1 0,1-1 0,-1 0 0,1 0 0,0 0 0,-1 1 0,1-1 0,0 2 0,-5 41 0,5-39 0,-3 300 0,5-156 0,-2-145 0,0 0 0,0-1 0,0 1 0,0 0 0,1 0 0,0-1 0,-1 1 0,1 0 0,1-1 0,-1 1 0,0-1 0,1 1 0,0-1 0,0 0 0,2 3 0,-2-4 0,0 0 0,1-1 0,-1 1 0,0-1 0,1 0 0,-1 0 0,1 0 0,-1 0 0,1 0 0,0 0 0,-1-1 0,1 1 0,0-1 0,-1 0 0,1 0 0,0 0 0,0 0 0,-1 0 0,1 0 0,0-1 0,3-1 0,15-3 0,-1 0 0,1-2 0,27-13 0,16-6 0,-14 11 0,62-9 0,32-9 0,-18 1 0,140-19 0,-183 37 0,-28 4 0,-28 4 0,0 1 0,50-2 0,-34 1 0,-36 4 0,0 0 0,0 1 0,0 0 0,0 1 0,-1-1 0,11 2 0,-16-1 0,1 1 0,0-1 0,-1 1 0,1-1 0,0 1 0,-1 0 0,1 0 0,-1 0 0,1 0 0,-1 0 0,0 0 0,1 0 0,-1 0 0,0 0 0,0 1 0,0-1 0,0 1 0,0-1 0,0 0 0,0 1 0,0 0 0,0-1 0,-1 1 0,1-1 0,-1 1 0,1 0 0,-1 0 0,0-1 0,1 4 0,0 4-195,-1-1 0,1 1 0,-1 0 0,0 0 0,-1-1 0,-3 16 0,-3 0-6631</inkml:trace>
+</inkml:ink>
+</file>
+
+<file path=ppt/ink/ink38.xml><?xml version="1.0" encoding="utf-8"?>
+<inkml:ink xmlns:inkml="http://www.w3.org/2003/InkML">
+  <inkml:definitions>
+    <inkml:context xml:id="ctx0">
+      <inkml:inkSource xml:id="inkSrc0">
+        <inkml:traceFormat>
+          <inkml:channel name="X" type="integer" min="-2.14748E9" max="2.14748E9" units="cm"/>
+          <inkml:channel name="Y" type="integer" min="-2.14748E9" max="2.14748E9" units="cm"/>
+          <inkml:channel name="F" type="integer" max="32767" units="dev"/>
+        </inkml:traceFormat>
+        <inkml:channelProperties>
+          <inkml:channelProperty channel="X" name="resolution" value="1000" units="1/cm"/>
+          <inkml:channelProperty channel="Y" name="resolution" value="1000" units="1/cm"/>
+          <inkml:channelProperty channel="F" name="resolution" value="0" units="1/dev"/>
+        </inkml:channelProperties>
+      </inkml:inkSource>
+      <inkml:timestamp xml:id="ts0" timeString="2026-02-12T19:07:47.621"/>
+    </inkml:context>
+    <inkml:brush xml:id="br0">
+      <inkml:brushProperty name="width" value="0.035" units="cm"/>
+      <inkml:brushProperty name="height" value="0.035" units="cm"/>
+      <inkml:brushProperty name="color" value="#E71224"/>
+    </inkml:brush>
+  </inkml:definitions>
+  <inkml:trace contextRef="#ctx0" brushRef="#br0">0 223 24575,'2'1'0,"0"-1"0,0 0 0,-1 1 0,1-1 0,0 1 0,-1 0 0,1 0 0,0 0 0,-1-1 0,1 1 0,-1 0 0,1 1 0,-1-1 0,0 0 0,1 0 0,-1 1 0,2 1 0,20 33 0,-10-16 0,40 62 0,-44-65 0,0-1 0,1-1 0,0 0 0,2 0 0,0-1 0,0 0 0,28 23 0,-37-36 0,-1 1 0,1-1 0,-1 0 0,1 0 0,0 0 0,0 0 0,-1 0 0,1-1 0,0 1 0,0-1 0,0 0 0,0 1 0,0-2 0,0 1 0,-1 0 0,1 0 0,5-2 0,48-21 0,-25 9 0,-16 7 0,0-1 0,-1 0 0,-1-1 0,1-1 0,-1 0 0,22-24 0,-19 19 0,0 1 0,0 0 0,27-16 0,38-27 0,-36 23 0,6 7 0,-41 22 0,0 1 0,0-1 0,-1-1 0,0 0 0,9-7 0,-7 3 0,1 0 0,0 2 0,0-1 0,1 2 0,0 0 0,0 0 0,0 1 0,1 1 0,0 0 0,15-3 0,-26 8 0,0 1 0,0-1 0,0 1 0,1 0 0,-1-1 0,0 1 0,0 1 0,0-1 0,0 0 0,0 1 0,-1 0 0,1-1 0,0 1 0,-1 0 0,1 1 0,-1-1 0,0 0 0,0 1 0,1-1 0,-2 1 0,3 2 0,8 12 0,-2 1 0,11 22 0,-11-20 0,-5-10 0,1-1 0,-1 0 0,1 1 0,1-2 0,0 1 0,14 13 0,-19-20 0,0 0 0,0-1 0,1 0 0,-1 1 0,0-1 0,1 0 0,-1 0 0,1 0 0,0 0 0,-1-1 0,1 1 0,-1-1 0,1 1 0,0-1 0,0 0 0,-1 0 0,1 0 0,0-1 0,-1 1 0,1-1 0,-1 1 0,1-1 0,0 0 0,-1 0 0,1 0 0,-1 0 0,0 0 0,1-1 0,-1 1 0,0-1 0,0 1 0,2-3 0,130-107 0,-3 32 0,-84 52 0,2 3 0,90-33 0,-136 56 0,0 1 0,0-1 0,0 1 0,0 0 0,-1 0 0,1 0 0,0 0 0,0 1 0,0-1 0,0 1 0,0 0 0,-1-1 0,1 1 0,0 1 0,0-1 0,-1 0 0,1 1 0,2 1 0,48 38 0,-31-22 0,-6-8 0,0 4 0,1-2 0,1 0 0,0-2 0,1 1 0,0-2 0,0-1 0,1 0 0,41 11 0,-25-12 0,-14-3 0,0 0 0,35 2 0,-48-7 0,-1 0 0,1-1 0,-1 0 0,0 0 0,1-1 0,-1 0 0,0 0 0,0-1 0,0 0 0,11-6 0,44-21 0,33-20 0,-82 41 0,1 1 0,0 1 0,0 1 0,21-7 0,-31 11 0,1 0 0,-1 1 0,0 0 0,1 0 0,-1 0 0,0 0 0,1 1 0,-1 0 0,1 0 0,-1 1 0,1-1 0,-1 1 0,0 1 0,1-1 0,-1 1 0,7 2 0,-11-3 4,-1-1-1,0 1 0,1-1 1,-1 0-1,1 1 1,-1-1-1,1 0 1,-1 1-1,1-1 0,-1 0 1,1 0-1,-1 1 1,1-1-1,-1 0 0,1 0 1,-1 0-1,1 0 1,0 0-1,-1 0 0,1 0 1,-1 0-1,1 0 1,-1 0-1,1 0 1,-1 0-1,1 0 0,0 0 1,-1 0-1,1-1 1,0 1-1,3-19-1474,-5 3-5355</inkml:trace>
+</inkml:ink>
+</file>
+
+<file path=ppt/ink/ink39.xml><?xml version="1.0" encoding="utf-8"?>
+<inkml:ink xmlns:inkml="http://www.w3.org/2003/InkML">
+  <inkml:definitions>
+    <inkml:context xml:id="ctx0">
+      <inkml:inkSource xml:id="inkSrc0">
+        <inkml:traceFormat>
+          <inkml:channel name="X" type="integer" min="-2.14748E9" max="2.14748E9" units="cm"/>
+          <inkml:channel name="Y" type="integer" min="-2.14748E9" max="2.14748E9" units="cm"/>
+          <inkml:channel name="F" type="integer" max="32767" units="dev"/>
+        </inkml:traceFormat>
+        <inkml:channelProperties>
+          <inkml:channelProperty channel="X" name="resolution" value="1000" units="1/cm"/>
+          <inkml:channelProperty channel="Y" name="resolution" value="1000" units="1/cm"/>
+          <inkml:channelProperty channel="F" name="resolution" value="0" units="1/dev"/>
+        </inkml:channelProperties>
+      </inkml:inkSource>
+      <inkml:timestamp xml:id="ts0" timeString="2026-02-12T19:07:53.419"/>
+    </inkml:context>
+    <inkml:brush xml:id="br0">
+      <inkml:brushProperty name="width" value="0.035" units="cm"/>
+      <inkml:brushProperty name="height" value="0.035" units="cm"/>
+      <inkml:brushProperty name="color" value="#E71224"/>
+    </inkml:brush>
+  </inkml:definitions>
+  <inkml:trace contextRef="#ctx0" brushRef="#br0">796 0 24575,'-1'19'0,"0"-1"0,-1 0 0,-1 0 0,-1 0 0,-1-1 0,-11 30 0,-55 96 0,46-96 0,-24 59 0,12-32 0,29-62 0,1 1 0,0 0 0,1 0 0,1 0 0,0 1 0,-4 18 0,-22 89 0,6-27 0,-9 38 0,16-67 0,-11 81 0,-16 112 0,39-226 0,-5 18 0,6-28 0,0-1 0,-2 35 0,-6 67 0,6-77 0,0 60 0,5-72 0,-2-1 0,-1 0 0,-1 0 0,-17 48 0,13-48 0,1 1 0,2 0 0,1 0 0,-2 41 0,8-33 0,-2 1 0,-10 57 0,6-59 0,-2 65 0,6-62 0,-9 56 0,5-55 0,2 0 0,2 47 0,2-48 0,-2 0 0,-10 56 0,4-38 0,2 0 0,3 0 0,7 71 0,-2-13 0,-2 949 0,-1-1038 0,-11 58 0,6-57 0,-2 54 0,8-60 0,0 21 0,-2 1 0,-11 69 0,-3 24 0,5-23 0,5-65 0,1 60 0,4-66 0,-13 91 0,5-74 0,4 0 0,2 0 0,7 69 0,-2-9 0,-15 44 0,-1 8 0,13-55 0,4 106 0,9-121 0,-5-59 0,0 61 0,-4-72 0,1 1 0,1-2 0,2 1 0,14 41 0,-8-33 0,12 87 0,-20-92 0,21 72 0,-4-24 0,-2 2 0,15 87 0,-31-156 5,1 1 1,1-1-1,11 26 0,-8-22-122,13 47-1,96 492-1445,-62-318 1563,-50-222 0,1 1 0,15 34 0,7 18 0,-4-3 869,44 88-1,-58-139-828,-6-8-40,-1-1 0,0 0 0,4 22 0,-6-23 0,0 1 0,2-1 0,-1 0 0,1-1 0,8 16 0,44 92 0,-29-57 0,-4-10 0,-7-15 0,22 37 0,41 84 0,-30-72 0,-19-31 0,2 0 0,2-2 0,64 74 0,-77-103 0,28 44 0,11 14 0,-1-7 0,-33-41 0,33 35 0,13 23 0,0-17 0,64 85 0,-111-129 0,9 13 0,-15-20 0,37 40 0,13 11 0,-46-49 0,0-1 0,28 24 0,15 9 0,-45-38 0,1-1 0,1 0 0,47 28 0,-40-29 0,-1 2 0,30 26 0,25 17 0,289 147 0,-215-127 0,-34-24 0,17 8 0,-113-53 0,-1-2 0,1-1 0,51 13 0,14 5 0,128 45 0,-162-54 0,1-3 0,0-2 0,79 8 0,-70-13 0,-32-3 0,68 3 0,-72-8 0,-1 2 0,0 1 0,-1 1 0,44 16 0,-38-11 0,0-1 0,57 6 0,-44-9 0,59 15 0,23 5 0,-71-19 0,-13 0 0,81 2 0,-109-9 0,0 0 0,36 10 0,-35-7 0,1 0 0,24 1 0,6-4 0,-5 0 0,0 1 0,45 9 0,-57-6 0,-1-2 0,53-2 0,21 1 0,-35 11 0,-54-8 0,0-1 0,29 1 0,601-3 0,-318-5 0,-307 2 0,0-2 0,0-1 0,0-1 0,32-12 0,28-5 0,-35 10 0,60-23 0,-23 6 0,-79 27 0,362-124 0,-347 114 0,0 0 0,0-2 0,21-17 0,-40 28 0,6-4 0,0-2 0,-1 1 0,0-1 0,-1 0 0,9-15 0,22-26 0,-5 17 0,45-62 0,53-117 0,-116 192 0,-10 15 0,-1 0 0,0 0 0,-1 0 0,1 0 0,-1 0 0,0-1 0,0 1 0,-1-1 0,0 0 0,0 0 0,2-9 0,-4 14 0,-1-1 0,1 1 0,-1 0 0,1 0 0,-1 0 0,0-1 0,1 1 0,-1 0 0,0 0 0,0 0 0,0 0 0,0 0 0,0 0 0,0 1 0,0-1 0,0 0 0,0 0 0,-1 1 0,1-1 0,0 1 0,0-1 0,-1 1 0,1 0 0,0-1 0,-1 1 0,1 0 0,0 0 0,-2 0 0,-45-3 0,41 3 0,-424 3 0,1255-3 0,-821 0 0,0 0 0,0 0 0,1 0 0,-1 0 0,0 1 0,0-1 0,0 1 0,1-1 0,-1 1 0,0 0 0,0 1 0,0-1 0,0 0 0,-1 1 0,1 0 0,0 0 0,0-1 0,-1 2 0,0-1 0,1 0 0,2 4 0,-2-1 0,-1 0 0,0 1 0,0-1 0,0 1 0,-1-1 0,1 1 0,-2 0 0,1-1 0,0 1 0,-1 0 0,-1 8 0,-4 229-1365,5-221-5461</inkml:trace>
+</inkml:ink>
+</file>
+
 <file path=ppt/ink/ink4.xml><?xml version="1.0" encoding="utf-8"?>
 <inkml:ink xmlns:inkml="http://www.w3.org/2003/InkML">
   <inkml:definitions>
@@ -956,6 +1099,286 @@
 </inkml:ink>
 </file>
 
+<file path=ppt/ink/ink40.xml><?xml version="1.0" encoding="utf-8"?>
+<inkml:ink xmlns:inkml="http://www.w3.org/2003/InkML">
+  <inkml:definitions>
+    <inkml:context xml:id="ctx0">
+      <inkml:inkSource xml:id="inkSrc0">
+        <inkml:traceFormat>
+          <inkml:channel name="X" type="integer" min="-2.14748E9" max="2.14748E9" units="cm"/>
+          <inkml:channel name="Y" type="integer" min="-2.14748E9" max="2.14748E9" units="cm"/>
+          <inkml:channel name="F" type="integer" max="32767" units="dev"/>
+        </inkml:traceFormat>
+        <inkml:channelProperties>
+          <inkml:channelProperty channel="X" name="resolution" value="1000" units="1/cm"/>
+          <inkml:channelProperty channel="Y" name="resolution" value="1000" units="1/cm"/>
+          <inkml:channelProperty channel="F" name="resolution" value="0" units="1/dev"/>
+        </inkml:channelProperties>
+      </inkml:inkSource>
+      <inkml:timestamp xml:id="ts0" timeString="2026-02-12T19:08:31.453"/>
+    </inkml:context>
+    <inkml:brush xml:id="br0">
+      <inkml:brushProperty name="width" value="0.035" units="cm"/>
+      <inkml:brushProperty name="height" value="0.035" units="cm"/>
+      <inkml:brushProperty name="color" value="#E71224"/>
+    </inkml:brush>
+  </inkml:definitions>
+  <inkml:trace contextRef="#ctx0" brushRef="#br0">0 0 24575</inkml:trace>
+</inkml:ink>
+</file>
+
+<file path=ppt/ink/ink41.xml><?xml version="1.0" encoding="utf-8"?>
+<inkml:ink xmlns:inkml="http://www.w3.org/2003/InkML">
+  <inkml:definitions>
+    <inkml:context xml:id="ctx0">
+      <inkml:inkSource xml:id="inkSrc0">
+        <inkml:traceFormat>
+          <inkml:channel name="X" type="integer" min="-2.14748E9" max="2.14748E9" units="cm"/>
+          <inkml:channel name="Y" type="integer" min="-2.14748E9" max="2.14748E9" units="cm"/>
+          <inkml:channel name="F" type="integer" max="32767" units="dev"/>
+        </inkml:traceFormat>
+        <inkml:channelProperties>
+          <inkml:channelProperty channel="X" name="resolution" value="1000" units="1/cm"/>
+          <inkml:channelProperty channel="Y" name="resolution" value="1000" units="1/cm"/>
+          <inkml:channelProperty channel="F" name="resolution" value="0" units="1/dev"/>
+        </inkml:channelProperties>
+      </inkml:inkSource>
+      <inkml:timestamp xml:id="ts0" timeString="2026-02-12T19:09:26.441"/>
+    </inkml:context>
+    <inkml:brush xml:id="br0">
+      <inkml:brushProperty name="width" value="0.035" units="cm"/>
+      <inkml:brushProperty name="height" value="0.035" units="cm"/>
+      <inkml:brushProperty name="color" value="#E71224"/>
+    </inkml:brush>
+  </inkml:definitions>
+  <inkml:trace contextRef="#ctx0" brushRef="#br0">1300 651 24506,'-1'25'0,"0"1"0,-2-1 0,0 0 0,-1 0 0,-2 0 0,0 0 0,-2 0 0,0-1 0,-1-1 0,-2 1 0,0-1 0,-1-1 0,-1 0 0,-1 0 0,0-1 0,-2-1 0,0 0 0,-1-1 0,0-1 0,-2 0 0,0-1 0,-1-1 0,0 0 0,-1-2 0,0 0 0,-1-1 0,-1-1 0,0-1 0,0-1 0,-1 0 0,0-2 0,-1 0 0,1-2 0,-1 0 0,0-2 0,-1-1 0,1 0 0,0-2 0,-1 0 0,0-2 0,1 0 0,0-2 0,-1 0 0,1-1 0,0-2 0,1 0 0,-1-2 0,1 0 0,0-2 0,1 0 0,0-1 0,0-1 0,1-1 0,1-1 0,0 0 0,1-2 0,0 0 0,1-1 0,0-1 0,2 0 0,0-1 0,1-1 0,0 0 0,2-1 0,0-1 0,1 0 0,1 0 0,1-1 0,0-1 0,2 1 0,1-1 0,0-1 0,2 0 0,0 0 0,2 0 0,1 0 0,0 0 0,2-1 0,0 1 0,2-1 0,0 0 0,2 1 0,0 0 0,1 0 0,2 0 0,0 0 0,2 0 0,0 1 0,1 1 0,2-1 0,0 1 0,1 1 0,1 0 0,1 0 0,0 1 0,2 1 0,0 0 0,1 1 0,0 1 0,2 0 0,0 1 0,1 1 0,0 0 0,1 2 0,0 0 0,1 1 0,1 1 0,0 1 0,0 1 0,1 0 0,0 2 0,1 0 0,-1 2 0,1 0 0,0 2 0,1 1 0,-1 0 0,0 2 0,1 0 0,0 2 0,-1 0 0,0 2 0,1 0 0,-1 1 0,0 2 0,-1 0 0,1 2 0,-1 0 0,0 2 0,-1 0 0,0 1 0,0 1 0,-1 1 0,-1 1 0,0 0 0,-1 2 0,0 0 0,-1 1 0,0 1 0,-2 0 0,0 1 0,-1 1 0,0 0 0,-2 1 0,0 1 0,-1 0 0,-1 0 0,-1 1 0,0 1 0,-2-1 0,-1 1 0,0 1 0,-2 0 0,0 0 0,-2 0 0,-1 0 0,0 0 0,-2 1 0,0 0 0</inkml:trace>
+</inkml:ink>
+</file>
+
+<file path=ppt/ink/ink42.xml><?xml version="1.0" encoding="utf-8"?>
+<inkml:ink xmlns:inkml="http://www.w3.org/2003/InkML">
+  <inkml:definitions>
+    <inkml:context xml:id="ctx0">
+      <inkml:inkSource xml:id="inkSrc0">
+        <inkml:traceFormat>
+          <inkml:channel name="X" type="integer" min="-2.14748E9" max="2.14748E9" units="cm"/>
+          <inkml:channel name="Y" type="integer" min="-2.14748E9" max="2.14748E9" units="cm"/>
+          <inkml:channel name="F" type="integer" max="32767" units="dev"/>
+        </inkml:traceFormat>
+        <inkml:channelProperties>
+          <inkml:channelProperty channel="X" name="resolution" value="1000" units="1/cm"/>
+          <inkml:channelProperty channel="Y" name="resolution" value="1000" units="1/cm"/>
+          <inkml:channelProperty channel="F" name="resolution" value="0" units="1/dev"/>
+        </inkml:channelProperties>
+      </inkml:inkSource>
+      <inkml:timestamp xml:id="ts0" timeString="2026-02-12T19:09:29.093"/>
+    </inkml:context>
+    <inkml:brush xml:id="br0">
+      <inkml:brushProperty name="width" value="0.035" units="cm"/>
+      <inkml:brushProperty name="height" value="0.035" units="cm"/>
+      <inkml:brushProperty name="color" value="#E71224"/>
+    </inkml:brush>
+  </inkml:definitions>
+  <inkml:trace contextRef="#ctx0" brushRef="#br0">0 1 24575,'58'-1'0,"68"3"0,-122-1 0,0 0 0,-1 0 0,1 0 0,0 0 0,0 1 0,-1 0 0,1-1 0,-1 1 0,0 1 0,1-1 0,-1 0 0,0 1 0,0-1 0,-1 1 0,1 0 0,0 0 0,-1 0 0,0 1 0,0-1 0,0 0 0,0 1 0,0 0 0,-1-1 0,1 1 0,-1 0 0,0-1 0,0 1 0,0 8 0,3 12 0,-2 0 0,0 0 0,-3 37 0,0-40 0,0 59-1365,1-57-5461</inkml:trace>
+</inkml:ink>
+</file>
+
+<file path=ppt/ink/ink43.xml><?xml version="1.0" encoding="utf-8"?>
+<inkml:ink xmlns:inkml="http://www.w3.org/2003/InkML">
+  <inkml:definitions>
+    <inkml:context xml:id="ctx0">
+      <inkml:inkSource xml:id="inkSrc0">
+        <inkml:traceFormat>
+          <inkml:channel name="X" type="integer" min="-2.14748E9" max="2.14748E9" units="cm"/>
+          <inkml:channel name="Y" type="integer" min="-2.14748E9" max="2.14748E9" units="cm"/>
+          <inkml:channel name="F" type="integer" max="32767" units="dev"/>
+        </inkml:traceFormat>
+        <inkml:channelProperties>
+          <inkml:channelProperty channel="X" name="resolution" value="1000" units="1/cm"/>
+          <inkml:channelProperty channel="Y" name="resolution" value="1000" units="1/cm"/>
+          <inkml:channelProperty channel="F" name="resolution" value="0" units="1/dev"/>
+        </inkml:channelProperties>
+      </inkml:inkSource>
+      <inkml:timestamp xml:id="ts0" timeString="2026-02-12T19:09:30.020"/>
+    </inkml:context>
+    <inkml:brush xml:id="br0">
+      <inkml:brushProperty name="width" value="0.035" units="cm"/>
+      <inkml:brushProperty name="height" value="0.035" units="cm"/>
+      <inkml:brushProperty name="color" value="#E71224"/>
+    </inkml:brush>
+  </inkml:definitions>
+  <inkml:trace contextRef="#ctx0" brushRef="#br0">0 48 24575,'5'0'0,"1"-4"0,4-2 0,5 1 0,5 0 0,3 2 0,2 1 0,1 1 0,-3-4 0,-1-1 0,-1 0 0,-3 2-8191</inkml:trace>
+</inkml:ink>
+</file>
+
+<file path=ppt/ink/ink44.xml><?xml version="1.0" encoding="utf-8"?>
+<inkml:ink xmlns:inkml="http://www.w3.org/2003/InkML">
+  <inkml:definitions>
+    <inkml:context xml:id="ctx0">
+      <inkml:inkSource xml:id="inkSrc0">
+        <inkml:traceFormat>
+          <inkml:channel name="X" type="integer" min="-2.14748E9" max="2.14748E9" units="cm"/>
+          <inkml:channel name="Y" type="integer" min="-2.14748E9" max="2.14748E9" units="cm"/>
+          <inkml:channel name="F" type="integer" max="32767" units="dev"/>
+        </inkml:traceFormat>
+        <inkml:channelProperties>
+          <inkml:channelProperty channel="X" name="resolution" value="1000" units="1/cm"/>
+          <inkml:channelProperty channel="Y" name="resolution" value="1000" units="1/cm"/>
+          <inkml:channelProperty channel="F" name="resolution" value="0" units="1/dev"/>
+        </inkml:channelProperties>
+      </inkml:inkSource>
+      <inkml:timestamp xml:id="ts0" timeString="2026-02-12T19:09:30.875"/>
+    </inkml:context>
+    <inkml:brush xml:id="br0">
+      <inkml:brushProperty name="width" value="0.035" units="cm"/>
+      <inkml:brushProperty name="height" value="0.035" units="cm"/>
+      <inkml:brushProperty name="color" value="#E71224"/>
+    </inkml:brush>
+  </inkml:definitions>
+  <inkml:trace contextRef="#ctx0" brushRef="#br0">0 0 24575,'424'0'-1365,"-401"0"-5461</inkml:trace>
+</inkml:ink>
+</file>
+
+<file path=ppt/ink/ink45.xml><?xml version="1.0" encoding="utf-8"?>
+<inkml:ink xmlns:inkml="http://www.w3.org/2003/InkML">
+  <inkml:definitions>
+    <inkml:context xml:id="ctx0">
+      <inkml:inkSource xml:id="inkSrc0">
+        <inkml:traceFormat>
+          <inkml:channel name="X" type="integer" min="-2.14748E9" max="2.14748E9" units="cm"/>
+          <inkml:channel name="Y" type="integer" min="-2.14748E9" max="2.14748E9" units="cm"/>
+          <inkml:channel name="F" type="integer" max="32767" units="dev"/>
+        </inkml:traceFormat>
+        <inkml:channelProperties>
+          <inkml:channelProperty channel="X" name="resolution" value="1000" units="1/cm"/>
+          <inkml:channelProperty channel="Y" name="resolution" value="1000" units="1/cm"/>
+          <inkml:channelProperty channel="F" name="resolution" value="0" units="1/dev"/>
+        </inkml:channelProperties>
+      </inkml:inkSource>
+      <inkml:timestamp xml:id="ts0" timeString="2026-02-12T19:09:31.829"/>
+    </inkml:context>
+    <inkml:brush xml:id="br0">
+      <inkml:brushProperty name="width" value="0.035" units="cm"/>
+      <inkml:brushProperty name="height" value="0.035" units="cm"/>
+      <inkml:brushProperty name="color" value="#E71224"/>
+    </inkml:brush>
+  </inkml:definitions>
+  <inkml:trace contextRef="#ctx0" brushRef="#br0">0 2 24575,'94'-1'0,"104"3"0,-194-2 0,-1 1 0,0 0 0,1-1 0,-1 1 0,0 0 0,0 0 0,0 1 0,0-1 0,0 1 0,0-1 0,0 1 0,0 0 0,0 0 0,-1 0 0,1 0 0,-1 1 0,4 4 0,-2-1 0,-1-1 0,0 1 0,0 0 0,-1 0 0,1-1 0,-1 2 0,-1-1 0,3 12 0,-2 6 0,-1-1 0,-1 1 0,-5 46 0,2-56 0,0 0 0,0 0 0,-2-1 0,1 1 0,-2-1 0,0 0 0,-13 21 0,19-34 2,0 0 1,0 0-1,0 0 0,0 0 0,0 0 0,0 0 1,0 0-1,0 0 0,0 0 0,0 0 0,0 0 1,0 0-1,-1 0 0,1-1 0,0 1 0,5-9-1096,-5 9 788,5-12-6520</inkml:trace>
+</inkml:ink>
+</file>
+
+<file path=ppt/ink/ink46.xml><?xml version="1.0" encoding="utf-8"?>
+<inkml:ink xmlns:inkml="http://www.w3.org/2003/InkML">
+  <inkml:definitions>
+    <inkml:context xml:id="ctx0">
+      <inkml:inkSource xml:id="inkSrc0">
+        <inkml:traceFormat>
+          <inkml:channel name="X" type="integer" min="-2.14748E9" max="2.14748E9" units="cm"/>
+          <inkml:channel name="Y" type="integer" min="-2.14748E9" max="2.14748E9" units="cm"/>
+          <inkml:channel name="F" type="integer" max="32767" units="dev"/>
+        </inkml:traceFormat>
+        <inkml:channelProperties>
+          <inkml:channelProperty channel="X" name="resolution" value="1000" units="1/cm"/>
+          <inkml:channelProperty channel="Y" name="resolution" value="1000" units="1/cm"/>
+          <inkml:channelProperty channel="F" name="resolution" value="0" units="1/dev"/>
+        </inkml:channelProperties>
+      </inkml:inkSource>
+      <inkml:timestamp xml:id="ts0" timeString="2026-02-12T19:09:32.695"/>
+    </inkml:context>
+    <inkml:brush xml:id="br0">
+      <inkml:brushProperty name="width" value="0.035" units="cm"/>
+      <inkml:brushProperty name="height" value="0.035" units="cm"/>
+      <inkml:brushProperty name="color" value="#E71224"/>
+    </inkml:brush>
+  </inkml:definitions>
+  <inkml:trace contextRef="#ctx0" brushRef="#br0">0 0 24575,'1'1'0,"0"-1"0,0 0 0,0 1 0,0-1 0,0 1 0,0-1 0,0 1 0,0-1 0,0 1 0,0 0 0,0-1 0,0 1 0,-1 0 0,1 0 0,0 0 0,-1 0 0,1-1 0,0 1 0,-1 0 0,1 0 0,-1 0 0,0 0 0,1 0 0,-1 0 0,0 1 0,1-1 0,-1 2 0,6 37 0,-5-28 0,26 125 0,-4-23 0,-13-76 0,-3 1 0,-1 0 0,1 49 0,-7-54 0,-1-2 0,2 1 0,1-1 0,11 59 0,-3-14 105,-9-60-473,1 0 1,0 0-1,5 18 1,-1-18-6459</inkml:trace>
+</inkml:ink>
+</file>
+
+<file path=ppt/ink/ink47.xml><?xml version="1.0" encoding="utf-8"?>
+<inkml:ink xmlns:inkml="http://www.w3.org/2003/InkML">
+  <inkml:definitions>
+    <inkml:context xml:id="ctx0">
+      <inkml:inkSource xml:id="inkSrc0">
+        <inkml:traceFormat>
+          <inkml:channel name="X" type="integer" min="-2.14748E9" max="2.14748E9" units="cm"/>
+          <inkml:channel name="Y" type="integer" min="-2.14748E9" max="2.14748E9" units="cm"/>
+          <inkml:channel name="F" type="integer" max="32767" units="dev"/>
+        </inkml:traceFormat>
+        <inkml:channelProperties>
+          <inkml:channelProperty channel="X" name="resolution" value="1000" units="1/cm"/>
+          <inkml:channelProperty channel="Y" name="resolution" value="1000" units="1/cm"/>
+          <inkml:channelProperty channel="F" name="resolution" value="0" units="1/dev"/>
+        </inkml:channelProperties>
+      </inkml:inkSource>
+      <inkml:timestamp xml:id="ts0" timeString="2026-02-12T19:10:12.906"/>
+    </inkml:context>
+    <inkml:brush xml:id="br0">
+      <inkml:brushProperty name="width" value="0.035" units="cm"/>
+      <inkml:brushProperty name="height" value="0.035" units="cm"/>
+      <inkml:brushProperty name="color" value="#E71224"/>
+    </inkml:brush>
+  </inkml:definitions>
+  <inkml:trace contextRef="#ctx0" brushRef="#br0">0 0 21389,'740'0'0</inkml:trace>
+</inkml:ink>
+</file>
+
+<file path=ppt/ink/ink48.xml><?xml version="1.0" encoding="utf-8"?>
+<inkml:ink xmlns:inkml="http://www.w3.org/2003/InkML">
+  <inkml:definitions>
+    <inkml:context xml:id="ctx0">
+      <inkml:inkSource xml:id="inkSrc0">
+        <inkml:traceFormat>
+          <inkml:channel name="X" type="integer" min="-2.14748E9" max="2.14748E9" units="cm"/>
+          <inkml:channel name="Y" type="integer" min="-2.14748E9" max="2.14748E9" units="cm"/>
+          <inkml:channel name="F" type="integer" max="32767" units="dev"/>
+        </inkml:traceFormat>
+        <inkml:channelProperties>
+          <inkml:channelProperty channel="X" name="resolution" value="1000" units="1/cm"/>
+          <inkml:channelProperty channel="Y" name="resolution" value="1000" units="1/cm"/>
+          <inkml:channelProperty channel="F" name="resolution" value="0" units="1/dev"/>
+        </inkml:channelProperties>
+      </inkml:inkSource>
+      <inkml:timestamp xml:id="ts0" timeString="2026-02-12T19:11:33.700"/>
+    </inkml:context>
+    <inkml:brush xml:id="br0">
+      <inkml:brushProperty name="width" value="0.035" units="cm"/>
+      <inkml:brushProperty name="height" value="0.035" units="cm"/>
+      <inkml:brushProperty name="color" value="#E71224"/>
+    </inkml:brush>
+  </inkml:definitions>
+  <inkml:trace contextRef="#ctx0" brushRef="#br0">0 0 24575,'0'611'0,"0"-600"0,1 0 0,0-1 0,1 1 0,0 0 0,0 0 0,1-1 0,6 16 0,19-74 0,-25 43-136,0 1-1,0 0 1,0 0-1,0 0 1,1 0-1,0 0 1,0 1-1,0-1 0,5-3 1,7-1-6690</inkml:trace>
+</inkml:ink>
+</file>
+
+<file path=ppt/ink/ink49.xml><?xml version="1.0" encoding="utf-8"?>
+<inkml:ink xmlns:inkml="http://www.w3.org/2003/InkML">
+  <inkml:definitions>
+    <inkml:context xml:id="ctx0">
+      <inkml:inkSource xml:id="inkSrc0">
+        <inkml:traceFormat>
+          <inkml:channel name="X" type="integer" min="-2.14748E9" max="2.14748E9" units="cm"/>
+          <inkml:channel name="Y" type="integer" min="-2.14748E9" max="2.14748E9" units="cm"/>
+          <inkml:channel name="F" type="integer" max="32767" units="dev"/>
+        </inkml:traceFormat>
+        <inkml:channelProperties>
+          <inkml:channelProperty channel="X" name="resolution" value="1000" units="1/cm"/>
+          <inkml:channelProperty channel="Y" name="resolution" value="1000" units="1/cm"/>
+          <inkml:channelProperty channel="F" name="resolution" value="0" units="1/dev"/>
+        </inkml:channelProperties>
+      </inkml:inkSource>
+      <inkml:timestamp xml:id="ts0" timeString="2026-02-12T19:11:35.118"/>
+    </inkml:context>
+    <inkml:brush xml:id="br0">
+      <inkml:brushProperty name="width" value="0.035" units="cm"/>
+      <inkml:brushProperty name="height" value="0.035" units="cm"/>
+      <inkml:brushProperty name="color" value="#E71224"/>
+    </inkml:brush>
+  </inkml:definitions>
+  <inkml:trace contextRef="#ctx0" brushRef="#br0">32 47 24575,'-20'57'0,"14"-7"0,2 1 0,2 0 0,9 86 0,-6-122 0,1-1 0,0 0 0,2 1 0,6 20 0,-8-31 0,-1 0 0,1 0 0,0 0 0,0-1 0,0 1 0,0-1 0,0 1 0,1-1 0,0 0 0,0 0 0,0 0 0,0 0 0,0-1 0,0 1 0,1-1 0,-1 0 0,1 0 0,0 0 0,-1 0 0,6 1 0,31 8 0,-2 2 0,58 26 0,-72-29 0,0-2 0,0-1 0,1-1 0,0-1 0,1-1 0,45 1 0,99 9 0,-168-13 0,0-1 0,-1 0 0,1 0 0,0-1 0,0 1 0,0 0 0,-1-1 0,1 1 0,0-1 0,-1 1 0,1-1 0,0 0 0,-1 1 0,1-1 0,-1 0 0,1 0 0,-1 0 0,0-1 0,1 1 0,-1 0 0,0 0 0,0-1 0,0 1 0,0-1 0,0 1 0,0-1 0,0 1 0,0-1 0,-1 0 0,1 1 0,0-1 0,-1 0 0,0 1 0,1-1 0,-1 0 0,0 0 0,0-2 0,2-12 0,-1 1 0,-1-1 0,-2-21 0,1 19 0,-1-19 0,-1-1 0,-1 1 0,-10-36 0,9 54 0,-1 0 0,-1 1 0,0 0 0,-1 1 0,-1-1 0,-1 2 0,-19-27 0,6 14 0,15 16 0,-1 2 0,-1 0 0,-20-19 0,25 26 0,0 0 0,-1 0 0,0 1 0,0 0 0,0 0 0,0 1 0,0 0 0,-1 0 0,1 0 0,-1 1 0,-12-2 0,-29 1 0,-50 4 0,50 0 0,-49-4 0,95 2-57,-1-1 0,1 1 1,0 0-1,-1-1 0,1 1 0,0-1 0,0 0 0,-1 0 0,1 0 0,0 0 0,0 0 1,0 0-1,0-1 0,0 1 0,0-1 0,0 1 0,1-1 0,-1 0 0,1 1 1,-1-1-1,1 0 0,-1 0 0,0-3 0,-4-11-6769</inkml:trace>
+</inkml:ink>
+</file>
+
 <file path=ppt/ink/ink5.xml><?xml version="1.0" encoding="utf-8"?>
 <inkml:ink xmlns:inkml="http://www.w3.org/2003/InkML">
   <inkml:definitions>
@@ -981,6 +1404,62 @@
     </inkml:brush>
   </inkml:definitions>
   <inkml:trace contextRef="#ctx0" brushRef="#br0">252 1 24575,'1'0'0,"0"1"0,0-1 0,0 1 0,0 0 0,0-1 0,0 1 0,0 0 0,0 0 0,0 0 0,-1 0 0,1 0 0,0 0 0,-1 0 0,1 0 0,-1 0 0,1 0 0,-1 0 0,1 0 0,-1 0 0,1 2 0,9 33 0,-7-25 0,12 26 0,1-1 0,29 47 0,13 29 0,-41-70 0,-12-26 0,1 0 0,1-1 0,11 17 0,3 4 0,28 69 0,1 4 0,-44-96 0,-2 0 0,1 1 0,-2-1 0,0 1 0,0 0 0,0 15 0,1 5 0,14 122 0,-12-83 0,-6 136 0,-3-86 0,3-78 0,-2 0 0,-9 46 0,1-33 0,-3 0 0,-29 80 0,20-68 0,17-49 0,-2 0 0,0-1 0,-1 1 0,-13 20 0,4-10 0,10-18 0,0 0 0,-1 0 0,0-1 0,-1-1 0,-12 13 0,2-6 0,-1 0 0,-1-2 0,-1-1 0,0 0 0,-1-2 0,-1 0 0,0-2 0,0 0 0,-1-2 0,0-1 0,-30 6 0,29-7-682,-47 20-1,62-22-6143</inkml:trace>
+</inkml:ink>
+</file>
+
+<file path=ppt/ink/ink50.xml><?xml version="1.0" encoding="utf-8"?>
+<inkml:ink xmlns:inkml="http://www.w3.org/2003/InkML">
+  <inkml:definitions>
+    <inkml:context xml:id="ctx0">
+      <inkml:inkSource xml:id="inkSrc0">
+        <inkml:traceFormat>
+          <inkml:channel name="X" type="integer" min="-2.14748E9" max="2.14748E9" units="cm"/>
+          <inkml:channel name="Y" type="integer" min="-2.14748E9" max="2.14748E9" units="cm"/>
+          <inkml:channel name="F" type="integer" max="32767" units="dev"/>
+        </inkml:traceFormat>
+        <inkml:channelProperties>
+          <inkml:channelProperty channel="X" name="resolution" value="1000" units="1/cm"/>
+          <inkml:channelProperty channel="Y" name="resolution" value="1000" units="1/cm"/>
+          <inkml:channelProperty channel="F" name="resolution" value="0" units="1/dev"/>
+        </inkml:channelProperties>
+      </inkml:inkSource>
+      <inkml:timestamp xml:id="ts0" timeString="2026-02-12T19:11:35.833"/>
+    </inkml:context>
+    <inkml:brush xml:id="br0">
+      <inkml:brushProperty name="width" value="0.035" units="cm"/>
+      <inkml:brushProperty name="height" value="0.035" units="cm"/>
+      <inkml:brushProperty name="color" value="#E71224"/>
+    </inkml:brush>
+  </inkml:definitions>
+  <inkml:trace contextRef="#ctx0" brushRef="#br0">0 52 24575,'5'0'0,"5"0"0,2-4 0,3-2 0,3 1 0,3 0 0,3 2 0,2 1 0,0-4 0,1 0 0,0 0 0,0 2 0,0 1 0,-4 1-8191</inkml:trace>
+</inkml:ink>
+</file>
+
+<file path=ppt/ink/ink51.xml><?xml version="1.0" encoding="utf-8"?>
+<inkml:ink xmlns:inkml="http://www.w3.org/2003/InkML">
+  <inkml:definitions>
+    <inkml:context xml:id="ctx0">
+      <inkml:inkSource xml:id="inkSrc0">
+        <inkml:traceFormat>
+          <inkml:channel name="X" type="integer" min="-2.14748E9" max="2.14748E9" units="cm"/>
+          <inkml:channel name="Y" type="integer" min="-2.14748E9" max="2.14748E9" units="cm"/>
+          <inkml:channel name="F" type="integer" max="32767" units="dev"/>
+        </inkml:traceFormat>
+        <inkml:channelProperties>
+          <inkml:channelProperty channel="X" name="resolution" value="1000" units="1/cm"/>
+          <inkml:channelProperty channel="Y" name="resolution" value="1000" units="1/cm"/>
+          <inkml:channelProperty channel="F" name="resolution" value="0" units="1/dev"/>
+        </inkml:channelProperties>
+      </inkml:inkSource>
+      <inkml:timestamp xml:id="ts0" timeString="2026-02-12T19:11:37.649"/>
+    </inkml:context>
+    <inkml:brush xml:id="br0">
+      <inkml:brushProperty name="width" value="0.035" units="cm"/>
+      <inkml:brushProperty name="height" value="0.035" units="cm"/>
+      <inkml:brushProperty name="color" value="#E71224"/>
+    </inkml:brush>
+  </inkml:definitions>
+  <inkml:trace contextRef="#ctx0" brushRef="#br0">361 159 24575,'0'-2'0,"0"0"0,-1-1 0,1 1 0,-1 0 0,0 0 0,0-1 0,1 1 0,-2 0 0,1 0 0,0 0 0,0 0 0,0 0 0,-1 0 0,1 1 0,-1-1 0,0 0 0,1 1 0,-1-1 0,0 1 0,0-1 0,0 1 0,0 0 0,0 0 0,0 0 0,-1 0 0,-2-1 0,-9-3 0,-1 1 0,0 1 0,-17-3 0,8 2 0,-1-1 0,-1 1 0,-32-1 0,52 5 0,-1 0 0,0 0 0,1 0 0,-1 1 0,0 0 0,1 0 0,-1 0 0,1 1 0,0 0 0,-1 0 0,1 1 0,0 0 0,-10 6 0,15-7 0,0-1 0,-1 1 0,1-1 0,0 1 0,0 0 0,1 0 0,-1-1 0,0 1 0,1 0 0,-1 0 0,1-1 0,-1 1 0,1 0 0,0 0 0,0 0 0,0 0 0,0 0 0,0 0 0,0 0 0,0-1 0,1 1 0,-1 0 0,1 0 0,-1 0 0,1 0 0,0-1 0,0 1 0,0 0 0,0-1 0,0 1 0,0-1 0,0 1 0,0-1 0,3 3 0,2 3 0,0 0 0,1 0 0,0-1 0,0 1 0,12 7 0,2-3 0,0 0 0,0-2 0,1 0 0,0-1 0,25 4 0,-23-5 0,-1 1 0,0 2 0,0 0 0,34 21 0,-31-15 0,53 21 0,-58-30 0,0 2 0,0 0 0,-1 1 0,25 17 0,-42-25 0,1 0 0,-1 0 0,0 1 0,0-1 0,0 1 0,0 0 0,0 0 0,-1 0 0,1 0 0,-1 0 0,0 1 0,0-1 0,0 1 0,0-1 0,-1 1 0,1 0 0,-1 0 0,0 0 0,0-1 0,-1 1 0,1 0 0,-1 0 0,0 0 0,0 0 0,0 0 0,0 0 0,-1 0 0,1 0 0,-1 0 0,0 0 0,0 0 0,-2 4 0,1-5 0,-1 1 0,1-1 0,0 0 0,-1 1 0,0-1 0,0-1 0,0 1 0,0 0 0,0-1 0,0 1 0,-1-1 0,1 0 0,-1 0 0,-7 2 0,-64 19 0,34-12 0,12-4 0,-1-1 0,0-2 0,0-1 0,0-1 0,0-2 0,-37-4 0,-16 1 0,77 4 0,1-1 0,-1-1 0,0 1 0,0-1 0,1 0 0,-1 0 0,0-1 0,1 0 0,-1 0 0,1 0 0,0-1 0,-6-3 0,9 4 0,0 1 0,0-1 0,0 0 0,0-1 0,0 1 0,1 0 0,-1 0 0,1-1 0,-1 1 0,1-1 0,0 1 0,0-1 0,0 0 0,1 1 0,-1-1 0,1 0 0,-1 0 0,1 1 0,0-1 0,0 0 0,0 0 0,0 1 0,1-1 0,-1 0 0,1 0 0,-1 1 0,2-4 0,0-2 0,1 0 0,-1 0 0,1 0 0,1 0 0,-1 0 0,1 1 0,0 0 0,1 0 0,0 0 0,0 0 0,1 1 0,0 0 0,0 0 0,0 0 0,0 1 0,1 0 0,0 0 0,0 0 0,1 1 0,-1 0 0,1 1 0,8-3 0,-6 2 0,1-1 0,-1 0 0,0 0 0,-1-1 0,1 0 0,-1-1 0,15-14 0,23-16 0,-38 30 0,-1-1 0,0 0 0,-1 0 0,1 0 0,-2-1 0,1 0 0,-1 0 0,-1-1 0,1 0 0,-2 0 0,1 0 0,-2 0 0,1-1 0,-1 1 0,-1-1 0,0 0 0,0 0 0,-1 0 0,-1 0 0,-1-19 0,1 27 0,-1-1 0,1 1 0,-1-1 0,0 1 0,0 0 0,-1-1 0,1 1 0,-1 0 0,1 0 0,-1 0 0,0 0 0,0 0 0,-1 0 0,1 0 0,-1 1 0,1-1 0,-1 1 0,0 0 0,1 0 0,-1 0 0,0 0 0,-1 0 0,-3-1 0,-8-3 0,0 1 0,0 0 0,0 1 0,-17-1 0,6 0 0,-20-2-1365,26 5-5461</inkml:trace>
 </inkml:ink>
 </file>
 
@@ -11423,6 +11902,44 @@
           </p:pic>
         </mc:Fallback>
       </mc:AlternateContent>
+      <p:sp>
+        <p:nvSpPr>
+          <p:cNvPr id="32" name="TextBox 31">
+            <a:extLst>
+              <a:ext uri="{FF2B5EF4-FFF2-40B4-BE49-F238E27FC236}">
+                <a16:creationId xmlns:a16="http://schemas.microsoft.com/office/drawing/2014/main" id="{7CFC3BDD-CEA8-8AE9-35D7-29C825F38B89}"/>
+              </a:ext>
+            </a:extLst>
+          </p:cNvPr>
+          <p:cNvSpPr txBox="1"/>
+          <p:nvPr/>
+        </p:nvSpPr>
+        <p:spPr>
+          <a:xfrm>
+            <a:off x="794752" y="5879090"/>
+            <a:ext cx="6121400" cy="369332"/>
+          </a:xfrm>
+          <a:prstGeom prst="rect">
+            <a:avLst/>
+          </a:prstGeom>
+          <a:noFill/>
+        </p:spPr>
+        <p:txBody>
+          <a:bodyPr wrap="square">
+            <a:spAutoFit/>
+          </a:bodyPr>
+          <a:lstStyle/>
+          <a:p>
+            <a:r>
+              <a:rPr lang="ko-KR" altLang="en-US" dirty="0">
+                <a:hlinkClick r:id="rId14"/>
+              </a:rPr>
+              <a:t>링크</a:t>
+            </a:r>
+            <a:endParaRPr lang="ko-KR" altLang="en-US" dirty="0"/>
+          </a:p>
+        </p:txBody>
+      </p:sp>
     </p:spTree>
     <p:extLst>
       <p:ext uri="{BB962C8B-B14F-4D97-AF65-F5344CB8AC3E}">
@@ -12519,6 +13036,44 @@
           </p:pic>
         </mc:Fallback>
       </mc:AlternateContent>
+      <p:sp>
+        <p:nvSpPr>
+          <p:cNvPr id="33" name="TextBox 32">
+            <a:extLst>
+              <a:ext uri="{FF2B5EF4-FFF2-40B4-BE49-F238E27FC236}">
+                <a16:creationId xmlns:a16="http://schemas.microsoft.com/office/drawing/2014/main" id="{D6391458-7F39-1E47-9A3A-0DE3065059FF}"/>
+              </a:ext>
+            </a:extLst>
+          </p:cNvPr>
+          <p:cNvSpPr txBox="1"/>
+          <p:nvPr/>
+        </p:nvSpPr>
+        <p:spPr>
+          <a:xfrm>
+            <a:off x="794752" y="5879090"/>
+            <a:ext cx="6121400" cy="369332"/>
+          </a:xfrm>
+          <a:prstGeom prst="rect">
+            <a:avLst/>
+          </a:prstGeom>
+          <a:noFill/>
+        </p:spPr>
+        <p:txBody>
+          <a:bodyPr wrap="square">
+            <a:spAutoFit/>
+          </a:bodyPr>
+          <a:lstStyle/>
+          <a:p>
+            <a:r>
+              <a:rPr lang="ko-KR" altLang="en-US" dirty="0">
+                <a:hlinkClick r:id="rId21"/>
+              </a:rPr>
+              <a:t>링크</a:t>
+            </a:r>
+            <a:endParaRPr lang="ko-KR" altLang="en-US" dirty="0"/>
+          </a:p>
+        </p:txBody>
+      </p:sp>
     </p:spTree>
     <p:extLst>
       <p:ext uri="{BB962C8B-B14F-4D97-AF65-F5344CB8AC3E}">
@@ -13586,8 +14141,12 @@
           <a:lstStyle/>
           <a:p>
             <a:r>
+              <a:rPr lang="ko-KR" altLang="en-US" dirty="0"/>
+              <a:t>기존에는 </a:t>
+            </a:r>
+            <a:r>
               <a:rPr lang="en-US" altLang="ko-KR" dirty="0"/>
-              <a:t>Loss</a:t>
+              <a:t>loss</a:t>
             </a:r>
             <a:r>
               <a:rPr lang="ko-KR" altLang="en-US" dirty="0"/>
@@ -15078,7 +15637,7 @@
         <p:spPr>
           <a:xfrm>
             <a:off x="1163052" y="5152725"/>
-            <a:ext cx="4322053" cy="1200329"/>
+            <a:ext cx="4450348" cy="1200329"/>
           </a:xfrm>
           <a:prstGeom prst="rect">
             <a:avLst/>
@@ -15093,7 +15652,7 @@
           <a:p>
             <a:r>
               <a:rPr lang="en-US" altLang="ko-KR" dirty="0"/>
-              <a:t>- device </a:t>
+              <a:t>-  device </a:t>
             </a:r>
             <a:r>
               <a:rPr lang="ko-KR" altLang="en-US" dirty="0"/>
@@ -15127,8 +15686,8 @@
               <a:t>은 동일한 </a:t>
             </a:r>
             <a:r>
-              <a:rPr lang="en-US" altLang="ko-KR" dirty="0" err="1"/>
-              <a:t>devic</a:t>
+              <a:rPr lang="en-US" altLang="ko-KR" dirty="0"/>
+              <a:t>device</a:t>
             </a:r>
             <a:r>
               <a:rPr lang="ko-KR" altLang="en-US" dirty="0"/>
@@ -15285,6 +15844,44 @@
               <a:buChar char="-"/>
             </a:pPr>
             <a:endParaRPr lang="en-US" altLang="ko-KR" dirty="0"/>
+          </a:p>
+        </p:txBody>
+      </p:sp>
+      <p:sp>
+        <p:nvSpPr>
+          <p:cNvPr id="16" name="TextBox 15">
+            <a:extLst>
+              <a:ext uri="{FF2B5EF4-FFF2-40B4-BE49-F238E27FC236}">
+                <a16:creationId xmlns:a16="http://schemas.microsoft.com/office/drawing/2014/main" id="{FFF1DD33-E518-CEE9-E56E-478A6ECADBCB}"/>
+              </a:ext>
+            </a:extLst>
+          </p:cNvPr>
+          <p:cNvSpPr txBox="1"/>
+          <p:nvPr/>
+        </p:nvSpPr>
+        <p:spPr>
+          <a:xfrm>
+            <a:off x="794752" y="5879090"/>
+            <a:ext cx="6121400" cy="369332"/>
+          </a:xfrm>
+          <a:prstGeom prst="rect">
+            <a:avLst/>
+          </a:prstGeom>
+          <a:noFill/>
+        </p:spPr>
+        <p:txBody>
+          <a:bodyPr wrap="square">
+            <a:spAutoFit/>
+          </a:bodyPr>
+          <a:lstStyle/>
+          <a:p>
+            <a:r>
+              <a:rPr lang="ko-KR" altLang="en-US" dirty="0">
+                <a:hlinkClick r:id="rId8"/>
+              </a:rPr>
+              <a:t>링크</a:t>
+            </a:r>
+            <a:endParaRPr lang="ko-KR" altLang="en-US" dirty="0"/>
           </a:p>
         </p:txBody>
       </p:sp>
@@ -15794,7 +16391,7 @@
                   <a:srgbClr val="00B0F0"/>
                 </a:solidFill>
               </a:rPr>
-              <a:t>추가설명</a:t>
+              <a:t>추가정리</a:t>
             </a:r>
           </a:p>
         </p:txBody>
@@ -16773,7 +17370,7 @@
         <p:spPr>
           <a:xfrm>
             <a:off x="1163052" y="272716"/>
-            <a:ext cx="7143302" cy="523220"/>
+            <a:ext cx="7351693" cy="523220"/>
           </a:xfrm>
           <a:prstGeom prst="rect">
             <a:avLst/>
@@ -16802,6 +17399,19 @@
               </a:rPr>
               <a:t>에서 빠져나오기 위한 여정</a:t>
             </a:r>
+            <a:r>
+              <a:rPr lang="en-US" altLang="ko-KR" sz="2800" b="1" dirty="0">
+                <a:solidFill>
+                  <a:srgbClr val="00B0F0"/>
+                </a:solidFill>
+              </a:rPr>
+              <a:t>1</a:t>
+            </a:r>
+            <a:endParaRPr lang="ko-KR" altLang="en-US" sz="2800" b="1" dirty="0">
+              <a:solidFill>
+                <a:srgbClr val="00B0F0"/>
+              </a:solidFill>
+            </a:endParaRPr>
           </a:p>
         </p:txBody>
       </p:sp>
@@ -16871,8 +17481,122 @@
         </p:blipFill>
         <p:spPr>
           <a:xfrm>
-            <a:off x="2962298" y="1480866"/>
+            <a:off x="809648" y="1480865"/>
             <a:ext cx="6020640" cy="3896269"/>
+          </a:xfrm>
+          <a:prstGeom prst="rect">
+            <a:avLst/>
+          </a:prstGeom>
+        </p:spPr>
+      </p:pic>
+      <p:sp>
+        <p:nvSpPr>
+          <p:cNvPr id="5" name="TextBox 4">
+            <a:extLst>
+              <a:ext uri="{FF2B5EF4-FFF2-40B4-BE49-F238E27FC236}">
+                <a16:creationId xmlns:a16="http://schemas.microsoft.com/office/drawing/2014/main" id="{A4B41F43-5B31-A46A-D431-FC96C01AED52}"/>
+              </a:ext>
+            </a:extLst>
+          </p:cNvPr>
+          <p:cNvSpPr txBox="1"/>
+          <p:nvPr/>
+        </p:nvSpPr>
+        <p:spPr>
+          <a:xfrm>
+            <a:off x="7610474" y="1600200"/>
+            <a:ext cx="4171951" cy="1477328"/>
+          </a:xfrm>
+          <a:prstGeom prst="rect">
+            <a:avLst/>
+          </a:prstGeom>
+          <a:noFill/>
+        </p:spPr>
+        <p:txBody>
+          <a:bodyPr wrap="square" rtlCol="0">
+            <a:spAutoFit/>
+          </a:bodyPr>
+          <a:lstStyle/>
+          <a:p>
+            <a:r>
+              <a:rPr lang="en-US" altLang="ko-KR" b="1" dirty="0"/>
+              <a:t>Mini-Batch</a:t>
+            </a:r>
+          </a:p>
+          <a:p>
+            <a:pPr marL="342900" indent="-342900">
+              <a:buFont typeface="Arial" panose="020B0604020202020204" pitchFamily="34" charset="0"/>
+              <a:buChar char="•"/>
+            </a:pPr>
+            <a:r>
+              <a:rPr lang="en-US" altLang="ko-KR" dirty="0"/>
+              <a:t>batch size</a:t>
+            </a:r>
+            <a:r>
+              <a:rPr lang="ko-KR" altLang="en-US" dirty="0" err="1"/>
+              <a:t>키울때</a:t>
+            </a:r>
+            <a:r>
+              <a:rPr lang="ko-KR" altLang="en-US" dirty="0"/>
+              <a:t> </a:t>
+            </a:r>
+            <a:r>
+              <a:rPr lang="en-US" altLang="ko-KR" dirty="0"/>
+              <a:t>learning rate</a:t>
+            </a:r>
+            <a:r>
+              <a:rPr lang="ko-KR" altLang="en-US" dirty="0"/>
+              <a:t>도 같이 키우자</a:t>
+            </a:r>
+            <a:endParaRPr lang="en-US" altLang="ko-KR" dirty="0"/>
+          </a:p>
+          <a:p>
+            <a:pPr marL="342900" indent="-342900">
+              <a:buFont typeface="Arial" panose="020B0604020202020204" pitchFamily="34" charset="0"/>
+              <a:buChar char="•"/>
+            </a:pPr>
+            <a:r>
+              <a:rPr lang="en-US" altLang="ko-KR" dirty="0"/>
+              <a:t>Warmup</a:t>
+            </a:r>
+            <a:r>
+              <a:rPr lang="ko-KR" altLang="en-US" dirty="0"/>
+              <a:t>하자 맨 처음 불안정하니까 </a:t>
+            </a:r>
+            <a:r>
+              <a:rPr lang="en-US" altLang="ko-KR" dirty="0"/>
+              <a:t>learning rate 0</a:t>
+            </a:r>
+            <a:r>
+              <a:rPr lang="ko-KR" altLang="en-US" dirty="0"/>
+              <a:t>부터 쭉 올리자</a:t>
+            </a:r>
+          </a:p>
+        </p:txBody>
+      </p:sp>
+      <p:pic>
+        <p:nvPicPr>
+          <p:cNvPr id="7" name="그림 6" descr="친필, 텍스트, 폰트이(가) 표시된 사진&#10;&#10;AI 생성 콘텐츠는 정확하지 않을 수 있습니다.">
+            <a:extLst>
+              <a:ext uri="{FF2B5EF4-FFF2-40B4-BE49-F238E27FC236}">
+                <a16:creationId xmlns:a16="http://schemas.microsoft.com/office/drawing/2014/main" id="{7E1966D3-FF71-21DB-D53F-1B5DA75DB52A}"/>
+              </a:ext>
+            </a:extLst>
+          </p:cNvPr>
+          <p:cNvPicPr>
+            <a:picLocks noChangeAspect="1"/>
+          </p:cNvPicPr>
+          <p:nvPr/>
+        </p:nvPicPr>
+        <p:blipFill>
+          <a:blip r:embed="rId3"/>
+          <a:stretch>
+            <a:fillRect/>
+          </a:stretch>
+        </p:blipFill>
+        <p:spPr>
+          <a:xfrm>
+            <a:off x="8144534" y="3155514"/>
+            <a:ext cx="3103830" cy="3281717"/>
           </a:xfrm>
           <a:prstGeom prst="rect">
             <a:avLst/>
@@ -16893,6 +17617,1856 @@
 </file>
 
 <file path=ppt/slides/slide32.xml><?xml version="1.0" encoding="utf-8"?>
+<p:sld xmlns:a="http://schemas.openxmlformats.org/drawingml/2006/main" xmlns:r="http://schemas.openxmlformats.org/officeDocument/2006/relationships" xmlns:p="http://schemas.openxmlformats.org/presentationml/2006/main">
+  <p:cSld>
+    <p:spTree>
+      <p:nvGrpSpPr>
+        <p:cNvPr id="1" name="">
+          <a:extLst>
+            <a:ext uri="{FF2B5EF4-FFF2-40B4-BE49-F238E27FC236}">
+              <a16:creationId xmlns:a16="http://schemas.microsoft.com/office/drawing/2014/main" id="{2CE675B3-9F31-E786-E5B3-8BD0480A071B}"/>
+            </a:ext>
+          </a:extLst>
+        </p:cNvPr>
+        <p:cNvGrpSpPr/>
+        <p:nvPr/>
+      </p:nvGrpSpPr>
+      <p:grpSpPr>
+        <a:xfrm>
+          <a:off x="0" y="0"/>
+          <a:ext cx="0" cy="0"/>
+          <a:chOff x="0" y="0"/>
+          <a:chExt cx="0" cy="0"/>
+        </a:xfrm>
+      </p:grpSpPr>
+      <p:cxnSp>
+        <p:nvCxnSpPr>
+          <p:cNvPr id="9" name="직선 연결선 8">
+            <a:extLst>
+              <a:ext uri="{FF2B5EF4-FFF2-40B4-BE49-F238E27FC236}">
+                <a16:creationId xmlns:a16="http://schemas.microsoft.com/office/drawing/2014/main" id="{82F68968-7491-9ECA-C0C5-9CC6B7B25CDB}"/>
+              </a:ext>
+            </a:extLst>
+          </p:cNvPr>
+          <p:cNvCxnSpPr/>
+          <p:nvPr/>
+        </p:nvCxnSpPr>
+        <p:spPr>
+          <a:xfrm>
+            <a:off x="144378" y="160422"/>
+            <a:ext cx="12060000" cy="0"/>
+          </a:xfrm>
+          <a:prstGeom prst="line">
+            <a:avLst/>
+          </a:prstGeom>
+          <a:ln w="57150"/>
+        </p:spPr>
+        <p:style>
+          <a:lnRef idx="1">
+            <a:schemeClr val="accent4"/>
+          </a:lnRef>
+          <a:fillRef idx="0">
+            <a:schemeClr val="accent4"/>
+          </a:fillRef>
+          <a:effectRef idx="0">
+            <a:schemeClr val="accent4"/>
+          </a:effectRef>
+          <a:fontRef idx="minor">
+            <a:schemeClr val="tx1"/>
+          </a:fontRef>
+        </p:style>
+      </p:cxnSp>
+      <p:cxnSp>
+        <p:nvCxnSpPr>
+          <p:cNvPr id="11" name="직선 연결선 10">
+            <a:extLst>
+              <a:ext uri="{FF2B5EF4-FFF2-40B4-BE49-F238E27FC236}">
+                <a16:creationId xmlns:a16="http://schemas.microsoft.com/office/drawing/2014/main" id="{91F4F259-B9A0-6EE8-86B5-09FB8FEC0A6E}"/>
+              </a:ext>
+            </a:extLst>
+          </p:cNvPr>
+          <p:cNvCxnSpPr/>
+          <p:nvPr/>
+        </p:nvCxnSpPr>
+        <p:spPr>
+          <a:xfrm>
+            <a:off x="64064" y="6697578"/>
+            <a:ext cx="12060000" cy="0"/>
+          </a:xfrm>
+          <a:prstGeom prst="line">
+            <a:avLst/>
+          </a:prstGeom>
+          <a:ln/>
+        </p:spPr>
+        <p:style>
+          <a:lnRef idx="1">
+            <a:schemeClr val="accent4"/>
+          </a:lnRef>
+          <a:fillRef idx="0">
+            <a:schemeClr val="accent4"/>
+          </a:fillRef>
+          <a:effectRef idx="0">
+            <a:schemeClr val="accent4"/>
+          </a:effectRef>
+          <a:fontRef idx="minor">
+            <a:schemeClr val="tx1"/>
+          </a:fontRef>
+        </p:style>
+      </p:cxnSp>
+      <p:sp>
+        <p:nvSpPr>
+          <p:cNvPr id="2" name="TextBox 1">
+            <a:extLst>
+              <a:ext uri="{FF2B5EF4-FFF2-40B4-BE49-F238E27FC236}">
+                <a16:creationId xmlns:a16="http://schemas.microsoft.com/office/drawing/2014/main" id="{2238268A-505D-ED37-E729-2FE2C5911012}"/>
+              </a:ext>
+            </a:extLst>
+          </p:cNvPr>
+          <p:cNvSpPr txBox="1"/>
+          <p:nvPr/>
+        </p:nvSpPr>
+        <p:spPr>
+          <a:xfrm>
+            <a:off x="1163052" y="272716"/>
+            <a:ext cx="7351693" cy="523220"/>
+          </a:xfrm>
+          <a:prstGeom prst="rect">
+            <a:avLst/>
+          </a:prstGeom>
+          <a:noFill/>
+        </p:spPr>
+        <p:txBody>
+          <a:bodyPr wrap="none" rtlCol="0">
+            <a:spAutoFit/>
+          </a:bodyPr>
+          <a:lstStyle/>
+          <a:p>
+            <a:r>
+              <a:rPr lang="en-US" altLang="ko-KR" sz="2800" b="1" dirty="0">
+                <a:solidFill>
+                  <a:srgbClr val="00B0F0"/>
+                </a:solidFill>
+              </a:rPr>
+              <a:t>Local minimum</a:t>
+            </a:r>
+            <a:r>
+              <a:rPr lang="ko-KR" altLang="en-US" sz="2800" b="1" dirty="0">
+                <a:solidFill>
+                  <a:srgbClr val="00B0F0"/>
+                </a:solidFill>
+              </a:rPr>
+              <a:t>에서 빠져나오기 위한 여정</a:t>
+            </a:r>
+            <a:r>
+              <a:rPr lang="en-US" altLang="ko-KR" sz="2800" b="1" dirty="0">
+                <a:solidFill>
+                  <a:srgbClr val="00B0F0"/>
+                </a:solidFill>
+              </a:rPr>
+              <a:t>2</a:t>
+            </a:r>
+            <a:endParaRPr lang="ko-KR" altLang="en-US" sz="2800" b="1" dirty="0">
+              <a:solidFill>
+                <a:srgbClr val="00B0F0"/>
+              </a:solidFill>
+            </a:endParaRPr>
+          </a:p>
+        </p:txBody>
+      </p:sp>
+      <p:sp>
+        <p:nvSpPr>
+          <p:cNvPr id="4" name="TextBox 3">
+            <a:extLst>
+              <a:ext uri="{FF2B5EF4-FFF2-40B4-BE49-F238E27FC236}">
+                <a16:creationId xmlns:a16="http://schemas.microsoft.com/office/drawing/2014/main" id="{6739ED01-0403-69DB-C7F7-E36F5A0DFE70}"/>
+              </a:ext>
+            </a:extLst>
+          </p:cNvPr>
+          <p:cNvSpPr txBox="1"/>
+          <p:nvPr/>
+        </p:nvSpPr>
+        <p:spPr>
+          <a:xfrm>
+            <a:off x="144378" y="272716"/>
+            <a:ext cx="736997" cy="338554"/>
+          </a:xfrm>
+          <a:prstGeom prst="rect">
+            <a:avLst/>
+          </a:prstGeom>
+          <a:noFill/>
+        </p:spPr>
+        <p:txBody>
+          <a:bodyPr wrap="none" rtlCol="0">
+            <a:spAutoFit/>
+          </a:bodyPr>
+          <a:lstStyle/>
+          <a:p>
+            <a:r>
+              <a:rPr lang="en-US" altLang="ko-KR" sz="1600" dirty="0">
+                <a:solidFill>
+                  <a:srgbClr val="00B0F0"/>
+                </a:solidFill>
+              </a:rPr>
+              <a:t>Part 4</a:t>
+            </a:r>
+            <a:endParaRPr lang="ko-KR" altLang="en-US" sz="1600" dirty="0">
+              <a:solidFill>
+                <a:srgbClr val="00B0F0"/>
+              </a:solidFill>
+            </a:endParaRPr>
+          </a:p>
+        </p:txBody>
+      </p:sp>
+      <p:sp>
+        <p:nvSpPr>
+          <p:cNvPr id="5" name="TextBox 4">
+            <a:extLst>
+              <a:ext uri="{FF2B5EF4-FFF2-40B4-BE49-F238E27FC236}">
+                <a16:creationId xmlns:a16="http://schemas.microsoft.com/office/drawing/2014/main" id="{9E17DB21-F68D-6DC8-5A7C-EE9619CD5634}"/>
+              </a:ext>
+            </a:extLst>
+          </p:cNvPr>
+          <p:cNvSpPr txBox="1"/>
+          <p:nvPr/>
+        </p:nvSpPr>
+        <p:spPr>
+          <a:xfrm>
+            <a:off x="6972299" y="2255338"/>
+            <a:ext cx="4171951" cy="1200329"/>
+          </a:xfrm>
+          <a:prstGeom prst="rect">
+            <a:avLst/>
+          </a:prstGeom>
+          <a:noFill/>
+        </p:spPr>
+        <p:txBody>
+          <a:bodyPr wrap="square" rtlCol="0">
+            <a:spAutoFit/>
+          </a:bodyPr>
+          <a:lstStyle/>
+          <a:p>
+            <a:r>
+              <a:rPr lang="en-US" altLang="ko-KR" b="1" dirty="0"/>
+              <a:t>Momentum</a:t>
+            </a:r>
+          </a:p>
+          <a:p>
+            <a:pPr marL="285750" indent="-285750">
+              <a:buFontTx/>
+              <a:buChar char="-"/>
+            </a:pPr>
+            <a:r>
+              <a:rPr lang="ko-KR" altLang="en-US" dirty="0"/>
+              <a:t>관성을 가지고있다</a:t>
+            </a:r>
+            <a:endParaRPr lang="en-US" altLang="ko-KR" dirty="0"/>
+          </a:p>
+          <a:p>
+            <a:pPr marL="285750" indent="-285750">
+              <a:buFontTx/>
+              <a:buChar char="-"/>
+            </a:pPr>
+            <a:r>
+              <a:rPr lang="ko-KR" altLang="en-US" dirty="0" err="1"/>
+              <a:t>좌우좌우는</a:t>
+            </a:r>
+            <a:r>
+              <a:rPr lang="ko-KR" altLang="en-US" dirty="0"/>
+              <a:t> 줄어들고</a:t>
+            </a:r>
+            <a:endParaRPr lang="en-US" altLang="ko-KR" dirty="0"/>
+          </a:p>
+          <a:p>
+            <a:pPr marL="285750" indent="-285750">
+              <a:buFontTx/>
+              <a:buChar char="-"/>
+            </a:pPr>
+            <a:r>
+              <a:rPr lang="ko-KR" altLang="en-US" dirty="0" err="1"/>
+              <a:t>앞으로가는건</a:t>
+            </a:r>
+            <a:r>
+              <a:rPr lang="ko-KR" altLang="en-US" dirty="0"/>
+              <a:t> 누적된다</a:t>
+            </a:r>
+          </a:p>
+        </p:txBody>
+      </p:sp>
+      <p:pic>
+        <p:nvPicPr>
+          <p:cNvPr id="2050" name="Picture 2" descr="Local Minima Optimization Algorithms Stochastic Gradient Descent Neural  Network Accelerate Convergence: Mini-batch Momentum In Deep">
+            <a:extLst>
+              <a:ext uri="{FF2B5EF4-FFF2-40B4-BE49-F238E27FC236}">
+                <a16:creationId xmlns:a16="http://schemas.microsoft.com/office/drawing/2014/main" id="{CFAAC4BB-5DE4-26A4-F3D8-8DECC7D050BD}"/>
+              </a:ext>
+            </a:extLst>
+          </p:cNvPr>
+          <p:cNvPicPr>
+            <a:picLocks noChangeAspect="1" noChangeArrowheads="1"/>
+          </p:cNvPicPr>
+          <p:nvPr/>
+        </p:nvPicPr>
+        <p:blipFill>
+          <a:blip r:embed="rId2">
+            <a:extLst>
+              <a:ext uri="{28A0092B-C50C-407E-A947-70E740481C1C}">
+                <a14:useLocalDpi xmlns:a14="http://schemas.microsoft.com/office/drawing/2010/main" val="0"/>
+              </a:ext>
+            </a:extLst>
+          </a:blip>
+          <a:srcRect/>
+          <a:stretch>
+            <a:fillRect/>
+          </a:stretch>
+        </p:blipFill>
+        <p:spPr bwMode="auto">
+          <a:xfrm>
+            <a:off x="1457325" y="2100263"/>
+            <a:ext cx="3986213" cy="2657475"/>
+          </a:xfrm>
+          <a:prstGeom prst="rect">
+            <a:avLst/>
+          </a:prstGeom>
+          <a:noFill/>
+          <a:extLst>
+            <a:ext uri="{909E8E84-426E-40DD-AFC4-6F175D3DCCD1}">
+              <a14:hiddenFill xmlns:a14="http://schemas.microsoft.com/office/drawing/2010/main">
+                <a:solidFill>
+                  <a:srgbClr val="FFFFFF"/>
+                </a:solidFill>
+              </a14:hiddenFill>
+            </a:ext>
+          </a:extLst>
+        </p:spPr>
+      </p:pic>
+    </p:spTree>
+    <p:extLst>
+      <p:ext uri="{BB962C8B-B14F-4D97-AF65-F5344CB8AC3E}">
+        <p14:creationId xmlns:p14="http://schemas.microsoft.com/office/powerpoint/2010/main" val="1654073903"/>
+      </p:ext>
+    </p:extLst>
+  </p:cSld>
+  <p:clrMapOvr>
+    <a:masterClrMapping/>
+  </p:clrMapOvr>
+</p:sld>
+</file>
+
+<file path=ppt/slides/slide33.xml><?xml version="1.0" encoding="utf-8"?>
+<p:sld xmlns:a="http://schemas.openxmlformats.org/drawingml/2006/main" xmlns:r="http://schemas.openxmlformats.org/officeDocument/2006/relationships" xmlns:p="http://schemas.openxmlformats.org/presentationml/2006/main">
+  <p:cSld>
+    <p:spTree>
+      <p:nvGrpSpPr>
+        <p:cNvPr id="1" name="">
+          <a:extLst>
+            <a:ext uri="{FF2B5EF4-FFF2-40B4-BE49-F238E27FC236}">
+              <a16:creationId xmlns:a16="http://schemas.microsoft.com/office/drawing/2014/main" id="{D73A1C21-D567-1A16-1682-243333A05F53}"/>
+            </a:ext>
+          </a:extLst>
+        </p:cNvPr>
+        <p:cNvGrpSpPr/>
+        <p:nvPr/>
+      </p:nvGrpSpPr>
+      <p:grpSpPr>
+        <a:xfrm>
+          <a:off x="0" y="0"/>
+          <a:ext cx="0" cy="0"/>
+          <a:chOff x="0" y="0"/>
+          <a:chExt cx="0" cy="0"/>
+        </a:xfrm>
+      </p:grpSpPr>
+      <p:cxnSp>
+        <p:nvCxnSpPr>
+          <p:cNvPr id="9" name="직선 연결선 8">
+            <a:extLst>
+              <a:ext uri="{FF2B5EF4-FFF2-40B4-BE49-F238E27FC236}">
+                <a16:creationId xmlns:a16="http://schemas.microsoft.com/office/drawing/2014/main" id="{37A3D0BC-689B-DC1E-DEEC-290C0556A0C8}"/>
+              </a:ext>
+            </a:extLst>
+          </p:cNvPr>
+          <p:cNvCxnSpPr/>
+          <p:nvPr/>
+        </p:nvCxnSpPr>
+        <p:spPr>
+          <a:xfrm>
+            <a:off x="144378" y="160422"/>
+            <a:ext cx="12060000" cy="0"/>
+          </a:xfrm>
+          <a:prstGeom prst="line">
+            <a:avLst/>
+          </a:prstGeom>
+          <a:ln w="57150"/>
+        </p:spPr>
+        <p:style>
+          <a:lnRef idx="1">
+            <a:schemeClr val="accent4"/>
+          </a:lnRef>
+          <a:fillRef idx="0">
+            <a:schemeClr val="accent4"/>
+          </a:fillRef>
+          <a:effectRef idx="0">
+            <a:schemeClr val="accent4"/>
+          </a:effectRef>
+          <a:fontRef idx="minor">
+            <a:schemeClr val="tx1"/>
+          </a:fontRef>
+        </p:style>
+      </p:cxnSp>
+      <p:cxnSp>
+        <p:nvCxnSpPr>
+          <p:cNvPr id="11" name="직선 연결선 10">
+            <a:extLst>
+              <a:ext uri="{FF2B5EF4-FFF2-40B4-BE49-F238E27FC236}">
+                <a16:creationId xmlns:a16="http://schemas.microsoft.com/office/drawing/2014/main" id="{82B5BA86-BC52-22E2-A757-FAC059850F87}"/>
+              </a:ext>
+            </a:extLst>
+          </p:cNvPr>
+          <p:cNvCxnSpPr/>
+          <p:nvPr/>
+        </p:nvCxnSpPr>
+        <p:spPr>
+          <a:xfrm>
+            <a:off x="64064" y="6697578"/>
+            <a:ext cx="12060000" cy="0"/>
+          </a:xfrm>
+          <a:prstGeom prst="line">
+            <a:avLst/>
+          </a:prstGeom>
+          <a:ln/>
+        </p:spPr>
+        <p:style>
+          <a:lnRef idx="1">
+            <a:schemeClr val="accent4"/>
+          </a:lnRef>
+          <a:fillRef idx="0">
+            <a:schemeClr val="accent4"/>
+          </a:fillRef>
+          <a:effectRef idx="0">
+            <a:schemeClr val="accent4"/>
+          </a:effectRef>
+          <a:fontRef idx="minor">
+            <a:schemeClr val="tx1"/>
+          </a:fontRef>
+        </p:style>
+      </p:cxnSp>
+      <p:sp>
+        <p:nvSpPr>
+          <p:cNvPr id="2" name="TextBox 1">
+            <a:extLst>
+              <a:ext uri="{FF2B5EF4-FFF2-40B4-BE49-F238E27FC236}">
+                <a16:creationId xmlns:a16="http://schemas.microsoft.com/office/drawing/2014/main" id="{E7F024CB-2000-CA91-7206-659DF1687711}"/>
+              </a:ext>
+            </a:extLst>
+          </p:cNvPr>
+          <p:cNvSpPr txBox="1"/>
+          <p:nvPr/>
+        </p:nvSpPr>
+        <p:spPr>
+          <a:xfrm>
+            <a:off x="1163052" y="272716"/>
+            <a:ext cx="7351693" cy="523220"/>
+          </a:xfrm>
+          <a:prstGeom prst="rect">
+            <a:avLst/>
+          </a:prstGeom>
+          <a:noFill/>
+        </p:spPr>
+        <p:txBody>
+          <a:bodyPr wrap="none" rtlCol="0">
+            <a:spAutoFit/>
+          </a:bodyPr>
+          <a:lstStyle/>
+          <a:p>
+            <a:r>
+              <a:rPr lang="en-US" altLang="ko-KR" sz="2800" b="1" dirty="0">
+                <a:solidFill>
+                  <a:srgbClr val="00B0F0"/>
+                </a:solidFill>
+              </a:rPr>
+              <a:t>Local minimum</a:t>
+            </a:r>
+            <a:r>
+              <a:rPr lang="ko-KR" altLang="en-US" sz="2800" b="1" dirty="0">
+                <a:solidFill>
+                  <a:srgbClr val="00B0F0"/>
+                </a:solidFill>
+              </a:rPr>
+              <a:t>에서 빠져나오기 위한 여정</a:t>
+            </a:r>
+            <a:r>
+              <a:rPr lang="en-US" altLang="ko-KR" sz="2800" b="1" dirty="0">
+                <a:solidFill>
+                  <a:srgbClr val="00B0F0"/>
+                </a:solidFill>
+              </a:rPr>
+              <a:t>3</a:t>
+            </a:r>
+            <a:endParaRPr lang="ko-KR" altLang="en-US" sz="2800" b="1" dirty="0">
+              <a:solidFill>
+                <a:srgbClr val="00B0F0"/>
+              </a:solidFill>
+            </a:endParaRPr>
+          </a:p>
+        </p:txBody>
+      </p:sp>
+      <p:sp>
+        <p:nvSpPr>
+          <p:cNvPr id="4" name="TextBox 3">
+            <a:extLst>
+              <a:ext uri="{FF2B5EF4-FFF2-40B4-BE49-F238E27FC236}">
+                <a16:creationId xmlns:a16="http://schemas.microsoft.com/office/drawing/2014/main" id="{9E104F91-17A2-CC42-21C4-B3E5264DC689}"/>
+              </a:ext>
+            </a:extLst>
+          </p:cNvPr>
+          <p:cNvSpPr txBox="1"/>
+          <p:nvPr/>
+        </p:nvSpPr>
+        <p:spPr>
+          <a:xfrm>
+            <a:off x="144378" y="272716"/>
+            <a:ext cx="736997" cy="338554"/>
+          </a:xfrm>
+          <a:prstGeom prst="rect">
+            <a:avLst/>
+          </a:prstGeom>
+          <a:noFill/>
+        </p:spPr>
+        <p:txBody>
+          <a:bodyPr wrap="none" rtlCol="0">
+            <a:spAutoFit/>
+          </a:bodyPr>
+          <a:lstStyle/>
+          <a:p>
+            <a:r>
+              <a:rPr lang="en-US" altLang="ko-KR" sz="1600" dirty="0">
+                <a:solidFill>
+                  <a:srgbClr val="00B0F0"/>
+                </a:solidFill>
+              </a:rPr>
+              <a:t>Part 4</a:t>
+            </a:r>
+            <a:endParaRPr lang="ko-KR" altLang="en-US" sz="1600" dirty="0">
+              <a:solidFill>
+                <a:srgbClr val="00B0F0"/>
+              </a:solidFill>
+            </a:endParaRPr>
+          </a:p>
+        </p:txBody>
+      </p:sp>
+      <p:sp>
+        <p:nvSpPr>
+          <p:cNvPr id="5" name="TextBox 4">
+            <a:extLst>
+              <a:ext uri="{FF2B5EF4-FFF2-40B4-BE49-F238E27FC236}">
+                <a16:creationId xmlns:a16="http://schemas.microsoft.com/office/drawing/2014/main" id="{23529E23-A27C-47E3-D3AA-86DA4D823439}"/>
+              </a:ext>
+            </a:extLst>
+          </p:cNvPr>
+          <p:cNvSpPr txBox="1"/>
+          <p:nvPr/>
+        </p:nvSpPr>
+        <p:spPr>
+          <a:xfrm>
+            <a:off x="782052" y="1649620"/>
+            <a:ext cx="5040661" cy="2308324"/>
+          </a:xfrm>
+          <a:prstGeom prst="rect">
+            <a:avLst/>
+          </a:prstGeom>
+          <a:noFill/>
+        </p:spPr>
+        <p:txBody>
+          <a:bodyPr wrap="square" rtlCol="0">
+            <a:spAutoFit/>
+          </a:bodyPr>
+          <a:lstStyle/>
+          <a:p>
+            <a:r>
+              <a:rPr lang="en-US" altLang="ko-KR" b="1" dirty="0"/>
+              <a:t>RMSprop(Root Mean Square Propagation) </a:t>
+            </a:r>
+          </a:p>
+          <a:p>
+            <a:pPr marL="285750" indent="-285750">
+              <a:buFontTx/>
+              <a:buChar char="-"/>
+            </a:pPr>
+            <a:r>
+              <a:rPr lang="en-US" altLang="ko-KR" dirty="0"/>
+              <a:t>Gradient</a:t>
+            </a:r>
+            <a:r>
+              <a:rPr lang="ko-KR" altLang="en-US" dirty="0"/>
+              <a:t>의 크기만 누적</a:t>
+            </a:r>
+            <a:endParaRPr lang="en-US" altLang="ko-KR" dirty="0"/>
+          </a:p>
+          <a:p>
+            <a:pPr marL="285750" indent="-285750">
+              <a:buFontTx/>
+              <a:buChar char="-"/>
+            </a:pPr>
+            <a:r>
+              <a:rPr lang="en-US" altLang="ko-KR" dirty="0"/>
+              <a:t>Learning rate</a:t>
+            </a:r>
+            <a:r>
+              <a:rPr lang="ko-KR" altLang="en-US" dirty="0"/>
+              <a:t>를 각 파라미터 별로 다르게</a:t>
+            </a:r>
+            <a:endParaRPr lang="en-US" altLang="ko-KR" dirty="0"/>
+          </a:p>
+          <a:p>
+            <a:pPr marL="285750" indent="-285750">
+              <a:buFontTx/>
+              <a:buChar char="-"/>
+            </a:pPr>
+            <a:r>
+              <a:rPr lang="ko-KR" altLang="en-US" dirty="0"/>
+              <a:t>경사를 보고 가파른 쪽은 조심조심</a:t>
+            </a:r>
+            <a:r>
+              <a:rPr lang="en-US" altLang="ko-KR" dirty="0"/>
+              <a:t>, </a:t>
+            </a:r>
+            <a:r>
+              <a:rPr lang="ko-KR" altLang="en-US" dirty="0"/>
+              <a:t>완만한 쪽은 과감하게</a:t>
+            </a:r>
+            <a:endParaRPr lang="en-US" altLang="ko-KR" dirty="0"/>
+          </a:p>
+          <a:p>
+            <a:pPr marL="285750" indent="-285750">
+              <a:buFontTx/>
+              <a:buChar char="-"/>
+            </a:pPr>
+            <a:r>
+              <a:rPr lang="en-US" altLang="ko-KR" dirty="0"/>
+              <a:t>(0.1,10)</a:t>
+            </a:r>
+            <a:r>
+              <a:rPr lang="ko-KR" altLang="en-US" dirty="0"/>
+              <a:t>인 경우 </a:t>
+            </a:r>
+            <a:r>
+              <a:rPr lang="en-US" altLang="ko-KR" dirty="0"/>
+              <a:t>-&gt; (1,5)</a:t>
+            </a:r>
+            <a:r>
+              <a:rPr lang="ko-KR" altLang="en-US" dirty="0"/>
+              <a:t>로 변환</a:t>
+            </a:r>
+            <a:endParaRPr lang="en-US" altLang="ko-KR" dirty="0"/>
+          </a:p>
+          <a:p>
+            <a:pPr marL="742950" lvl="1" indent="-285750">
+              <a:buFontTx/>
+              <a:buChar char="-"/>
+            </a:pPr>
+            <a:r>
+              <a:rPr lang="en-US" altLang="ko-KR" dirty="0"/>
+              <a:t>0.1</a:t>
+            </a:r>
+            <a:r>
+              <a:rPr lang="ko-KR" altLang="en-US" dirty="0"/>
+              <a:t>과 </a:t>
+            </a:r>
+            <a:r>
+              <a:rPr lang="en-US" altLang="ko-KR" dirty="0"/>
+              <a:t>10</a:t>
+            </a:r>
+            <a:r>
+              <a:rPr lang="ko-KR" altLang="en-US" dirty="0"/>
+              <a:t>을 다른 </a:t>
+            </a:r>
+            <a:r>
+              <a:rPr lang="en-US" altLang="ko-KR" dirty="0"/>
+              <a:t>Learning rate </a:t>
+            </a:r>
+            <a:r>
+              <a:rPr lang="ko-KR" altLang="en-US" dirty="0"/>
+              <a:t>주는 것 같음</a:t>
+            </a:r>
+          </a:p>
+        </p:txBody>
+      </p:sp>
+      <p:sp>
+        <p:nvSpPr>
+          <p:cNvPr id="3" name="십자형 2">
+            <a:extLst>
+              <a:ext uri="{FF2B5EF4-FFF2-40B4-BE49-F238E27FC236}">
+                <a16:creationId xmlns:a16="http://schemas.microsoft.com/office/drawing/2014/main" id="{3D34986D-7E3E-85EE-171E-41020CF82834}"/>
+              </a:ext>
+            </a:extLst>
+          </p:cNvPr>
+          <p:cNvSpPr/>
+          <p:nvPr/>
+        </p:nvSpPr>
+        <p:spPr>
+          <a:xfrm>
+            <a:off x="5934933" y="2361558"/>
+            <a:ext cx="868711" cy="885811"/>
+          </a:xfrm>
+          <a:prstGeom prst="plus">
+            <a:avLst>
+              <a:gd name="adj" fmla="val 38846"/>
+            </a:avLst>
+          </a:prstGeom>
+        </p:spPr>
+        <p:style>
+          <a:lnRef idx="2">
+            <a:schemeClr val="accent1">
+              <a:shade val="15000"/>
+            </a:schemeClr>
+          </a:lnRef>
+          <a:fillRef idx="1">
+            <a:schemeClr val="accent1"/>
+          </a:fillRef>
+          <a:effectRef idx="0">
+            <a:schemeClr val="accent1"/>
+          </a:effectRef>
+          <a:fontRef idx="minor">
+            <a:schemeClr val="lt1"/>
+          </a:fontRef>
+        </p:style>
+        <p:txBody>
+          <a:bodyPr rtlCol="0" anchor="ctr"/>
+          <a:lstStyle/>
+          <a:p>
+            <a:pPr algn="ctr"/>
+            <a:endParaRPr lang="ko-KR" altLang="en-US"/>
+          </a:p>
+        </p:txBody>
+      </p:sp>
+      <p:sp>
+        <p:nvSpPr>
+          <p:cNvPr id="7" name="TextBox 6">
+            <a:extLst>
+              <a:ext uri="{FF2B5EF4-FFF2-40B4-BE49-F238E27FC236}">
+                <a16:creationId xmlns:a16="http://schemas.microsoft.com/office/drawing/2014/main" id="{9B3FFDC2-5171-4D73-4A9F-EC3EFE490B82}"/>
+              </a:ext>
+            </a:extLst>
+          </p:cNvPr>
+          <p:cNvSpPr txBox="1"/>
+          <p:nvPr/>
+        </p:nvSpPr>
+        <p:spPr>
+          <a:xfrm>
+            <a:off x="7553910" y="2619116"/>
+            <a:ext cx="1921669" cy="369332"/>
+          </a:xfrm>
+          <a:prstGeom prst="rect">
+            <a:avLst/>
+          </a:prstGeom>
+          <a:noFill/>
+        </p:spPr>
+        <p:txBody>
+          <a:bodyPr wrap="square">
+            <a:spAutoFit/>
+          </a:bodyPr>
+          <a:lstStyle/>
+          <a:p>
+            <a:r>
+              <a:rPr lang="en-US" altLang="ko-KR" b="1" dirty="0"/>
+              <a:t>Momentum</a:t>
+            </a:r>
+          </a:p>
+        </p:txBody>
+      </p:sp>
+      <p:sp>
+        <p:nvSpPr>
+          <p:cNvPr id="10" name="화살표: 아래쪽 9">
+            <a:extLst>
+              <a:ext uri="{FF2B5EF4-FFF2-40B4-BE49-F238E27FC236}">
+                <a16:creationId xmlns:a16="http://schemas.microsoft.com/office/drawing/2014/main" id="{75AD14C8-65E8-669E-E5AB-A1B6E639B00C}"/>
+              </a:ext>
+            </a:extLst>
+          </p:cNvPr>
+          <p:cNvSpPr/>
+          <p:nvPr/>
+        </p:nvSpPr>
+        <p:spPr>
+          <a:xfrm>
+            <a:off x="6219825" y="4133850"/>
+            <a:ext cx="771525" cy="1038220"/>
+          </a:xfrm>
+          <a:prstGeom prst="downArrow">
+            <a:avLst/>
+          </a:prstGeom>
+        </p:spPr>
+        <p:style>
+          <a:lnRef idx="2">
+            <a:schemeClr val="accent1">
+              <a:shade val="15000"/>
+            </a:schemeClr>
+          </a:lnRef>
+          <a:fillRef idx="1">
+            <a:schemeClr val="accent1"/>
+          </a:fillRef>
+          <a:effectRef idx="0">
+            <a:schemeClr val="accent1"/>
+          </a:effectRef>
+          <a:fontRef idx="minor">
+            <a:schemeClr val="lt1"/>
+          </a:fontRef>
+        </p:style>
+        <p:txBody>
+          <a:bodyPr rtlCol="0" anchor="ctr"/>
+          <a:lstStyle/>
+          <a:p>
+            <a:pPr algn="ctr"/>
+            <a:endParaRPr lang="ko-KR" altLang="en-US"/>
+          </a:p>
+        </p:txBody>
+      </p:sp>
+      <p:sp>
+        <p:nvSpPr>
+          <p:cNvPr id="12" name="TextBox 11">
+            <a:extLst>
+              <a:ext uri="{FF2B5EF4-FFF2-40B4-BE49-F238E27FC236}">
+                <a16:creationId xmlns:a16="http://schemas.microsoft.com/office/drawing/2014/main" id="{A4CB8D64-15CB-0080-06F0-E8E519CD3729}"/>
+              </a:ext>
+            </a:extLst>
+          </p:cNvPr>
+          <p:cNvSpPr txBox="1"/>
+          <p:nvPr/>
+        </p:nvSpPr>
+        <p:spPr>
+          <a:xfrm>
+            <a:off x="4447619" y="5494873"/>
+            <a:ext cx="1921669" cy="369332"/>
+          </a:xfrm>
+          <a:prstGeom prst="rect">
+            <a:avLst/>
+          </a:prstGeom>
+          <a:noFill/>
+        </p:spPr>
+        <p:txBody>
+          <a:bodyPr wrap="square">
+            <a:spAutoFit/>
+          </a:bodyPr>
+          <a:lstStyle/>
+          <a:p>
+            <a:r>
+              <a:rPr lang="en-US" altLang="ko-KR" b="1" dirty="0"/>
+              <a:t>Adam</a:t>
+            </a:r>
+          </a:p>
+        </p:txBody>
+      </p:sp>
+      <p:pic>
+        <p:nvPicPr>
+          <p:cNvPr id="14" name="그림 13" descr="폰트, 라인, 화이트, 텍스트이(가) 표시된 사진&#10;&#10;AI 생성 콘텐츠는 정확하지 않을 수 있습니다.">
+            <a:extLst>
+              <a:ext uri="{FF2B5EF4-FFF2-40B4-BE49-F238E27FC236}">
+                <a16:creationId xmlns:a16="http://schemas.microsoft.com/office/drawing/2014/main" id="{DBBD4F46-7814-D4BE-E918-1B6E12C9BB7A}"/>
+              </a:ext>
+            </a:extLst>
+          </p:cNvPr>
+          <p:cNvPicPr>
+            <a:picLocks noChangeAspect="1"/>
+          </p:cNvPicPr>
+          <p:nvPr/>
+        </p:nvPicPr>
+        <p:blipFill>
+          <a:blip r:embed="rId2"/>
+          <a:stretch>
+            <a:fillRect/>
+          </a:stretch>
+        </p:blipFill>
+        <p:spPr>
+          <a:xfrm>
+            <a:off x="5443321" y="5266055"/>
+            <a:ext cx="3096057" cy="924054"/>
+          </a:xfrm>
+          <a:prstGeom prst="rect">
+            <a:avLst/>
+          </a:prstGeom>
+        </p:spPr>
+      </p:pic>
+      <mc:AlternateContent xmlns:mc="http://schemas.openxmlformats.org/markup-compatibility/2006">
+        <mc:Choice xmlns:p14="http://schemas.microsoft.com/office/powerpoint/2010/main" Requires="p14">
+          <p:contentPart p14:bwMode="auto" r:id="rId3">
+            <p14:nvContentPartPr>
+              <p14:cNvPr id="19" name="잉크 18">
+                <a:extLst>
+                  <a:ext uri="{FF2B5EF4-FFF2-40B4-BE49-F238E27FC236}">
+                    <a16:creationId xmlns:a16="http://schemas.microsoft.com/office/drawing/2014/main" id="{2B64AFFD-4E71-8AA4-9348-019383F92D27}"/>
+                  </a:ext>
+                </a:extLst>
+              </p14:cNvPr>
+              <p14:cNvContentPartPr/>
+              <p14:nvPr/>
+            </p14:nvContentPartPr>
+            <p14:xfrm>
+              <a:off x="7953525" y="5473875"/>
+              <a:ext cx="461520" cy="461520"/>
+            </p14:xfrm>
+          </p:contentPart>
+        </mc:Choice>
+        <mc:Fallback>
+          <p:pic>
+            <p:nvPicPr>
+              <p:cNvPr id="19" name="잉크 18">
+                <a:extLst>
+                  <a:ext uri="{FF2B5EF4-FFF2-40B4-BE49-F238E27FC236}">
+                    <a16:creationId xmlns:a16="http://schemas.microsoft.com/office/drawing/2014/main" id="{2B64AFFD-4E71-8AA4-9348-019383F92D27}"/>
+                  </a:ext>
+                </a:extLst>
+              </p:cNvPr>
+              <p:cNvPicPr/>
+              <p:nvPr/>
+            </p:nvPicPr>
+            <p:blipFill>
+              <a:blip r:embed="rId4"/>
+              <a:stretch>
+                <a:fillRect/>
+              </a:stretch>
+            </p:blipFill>
+            <p:spPr>
+              <a:xfrm>
+                <a:off x="7947405" y="5467755"/>
+                <a:ext cx="473760" cy="473760"/>
+              </a:xfrm>
+              <a:prstGeom prst="rect">
+                <a:avLst/>
+              </a:prstGeom>
+            </p:spPr>
+          </p:pic>
+        </mc:Fallback>
+      </mc:AlternateContent>
+      <p:grpSp>
+        <p:nvGrpSpPr>
+          <p:cNvPr id="25" name="그룹 24">
+            <a:extLst>
+              <a:ext uri="{FF2B5EF4-FFF2-40B4-BE49-F238E27FC236}">
+                <a16:creationId xmlns:a16="http://schemas.microsoft.com/office/drawing/2014/main" id="{E18EE2E3-8A42-52D9-EE39-6C983CA45A0C}"/>
+              </a:ext>
+            </a:extLst>
+          </p:cNvPr>
+          <p:cNvGrpSpPr/>
+          <p:nvPr/>
+        </p:nvGrpSpPr>
+        <p:grpSpPr>
+          <a:xfrm>
+            <a:off x="4285485" y="1923915"/>
+            <a:ext cx="4754520" cy="4611240"/>
+            <a:chOff x="4285485" y="1923915"/>
+            <a:chExt cx="4754520" cy="4611240"/>
+          </a:xfrm>
+        </p:grpSpPr>
+        <mc:AlternateContent xmlns:mc="http://schemas.openxmlformats.org/markup-compatibility/2006">
+          <mc:Choice xmlns:p14="http://schemas.microsoft.com/office/powerpoint/2010/main" Requires="p14">
+            <p:contentPart p14:bwMode="auto" r:id="rId5">
+              <p14:nvContentPartPr>
+                <p14:cNvPr id="20" name="잉크 19">
+                  <a:extLst>
+                    <a:ext uri="{FF2B5EF4-FFF2-40B4-BE49-F238E27FC236}">
+                      <a16:creationId xmlns:a16="http://schemas.microsoft.com/office/drawing/2014/main" id="{59091B11-5B98-2593-25D5-4B565842A837}"/>
+                    </a:ext>
+                  </a:extLst>
+                </p14:cNvPr>
+                <p14:cNvContentPartPr/>
+                <p14:nvPr/>
+              </p14:nvContentPartPr>
+              <p14:xfrm>
+                <a:off x="8249805" y="2933715"/>
+                <a:ext cx="790200" cy="2419920"/>
+              </p14:xfrm>
+            </p:contentPart>
+          </mc:Choice>
+          <mc:Fallback>
+            <p:pic>
+              <p:nvPicPr>
+                <p:cNvPr id="20" name="잉크 19">
+                  <a:extLst>
+                    <a:ext uri="{FF2B5EF4-FFF2-40B4-BE49-F238E27FC236}">
+                      <a16:creationId xmlns:a16="http://schemas.microsoft.com/office/drawing/2014/main" id="{59091B11-5B98-2593-25D5-4B565842A837}"/>
+                    </a:ext>
+                  </a:extLst>
+                </p:cNvPr>
+                <p:cNvPicPr/>
+                <p:nvPr/>
+              </p:nvPicPr>
+              <p:blipFill>
+                <a:blip r:embed="rId6"/>
+                <a:stretch>
+                  <a:fillRect/>
+                </a:stretch>
+              </p:blipFill>
+              <p:spPr>
+                <a:xfrm>
+                  <a:off x="8243685" y="2927595"/>
+                  <a:ext cx="802440" cy="2432160"/>
+                </a:xfrm>
+                <a:prstGeom prst="rect">
+                  <a:avLst/>
+                </a:prstGeom>
+              </p:spPr>
+            </p:pic>
+          </mc:Fallback>
+        </mc:AlternateContent>
+        <mc:AlternateContent xmlns:mc="http://schemas.openxmlformats.org/markup-compatibility/2006">
+          <mc:Choice xmlns:p14="http://schemas.microsoft.com/office/powerpoint/2010/main" Requires="p14">
+            <p:contentPart p14:bwMode="auto" r:id="rId7">
+              <p14:nvContentPartPr>
+                <p14:cNvPr id="21" name="잉크 20">
+                  <a:extLst>
+                    <a:ext uri="{FF2B5EF4-FFF2-40B4-BE49-F238E27FC236}">
+                      <a16:creationId xmlns:a16="http://schemas.microsoft.com/office/drawing/2014/main" id="{AD2B20AE-28B6-4F50-7572-E4EFD9C92FA1}"/>
+                    </a:ext>
+                  </a:extLst>
+                </p14:cNvPr>
+                <p14:cNvContentPartPr/>
+                <p14:nvPr/>
+              </p14:nvContentPartPr>
+              <p14:xfrm>
+                <a:off x="8181045" y="5229075"/>
+                <a:ext cx="488520" cy="218520"/>
+              </p14:xfrm>
+            </p:contentPart>
+          </mc:Choice>
+          <mc:Fallback>
+            <p:pic>
+              <p:nvPicPr>
+                <p:cNvPr id="21" name="잉크 20">
+                  <a:extLst>
+                    <a:ext uri="{FF2B5EF4-FFF2-40B4-BE49-F238E27FC236}">
+                      <a16:creationId xmlns:a16="http://schemas.microsoft.com/office/drawing/2014/main" id="{AD2B20AE-28B6-4F50-7572-E4EFD9C92FA1}"/>
+                    </a:ext>
+                  </a:extLst>
+                </p:cNvPr>
+                <p:cNvPicPr/>
+                <p:nvPr/>
+              </p:nvPicPr>
+              <p:blipFill>
+                <a:blip r:embed="rId8"/>
+                <a:stretch>
+                  <a:fillRect/>
+                </a:stretch>
+              </p:blipFill>
+              <p:spPr>
+                <a:xfrm>
+                  <a:off x="8174925" y="5222955"/>
+                  <a:ext cx="500760" cy="230760"/>
+                </a:xfrm>
+                <a:prstGeom prst="rect">
+                  <a:avLst/>
+                </a:prstGeom>
+              </p:spPr>
+            </p:pic>
+          </mc:Fallback>
+        </mc:AlternateContent>
+        <mc:AlternateContent xmlns:mc="http://schemas.openxmlformats.org/markup-compatibility/2006">
+          <mc:Choice xmlns:p14="http://schemas.microsoft.com/office/powerpoint/2010/main" Requires="p14">
+            <p:contentPart p14:bwMode="auto" r:id="rId9">
+              <p14:nvContentPartPr>
+                <p14:cNvPr id="22" name="잉크 21">
+                  <a:extLst>
+                    <a:ext uri="{FF2B5EF4-FFF2-40B4-BE49-F238E27FC236}">
+                      <a16:creationId xmlns:a16="http://schemas.microsoft.com/office/drawing/2014/main" id="{E25BDAEC-F73E-0DFB-1905-8F186081D687}"/>
+                    </a:ext>
+                  </a:extLst>
+                </p14:cNvPr>
+                <p14:cNvContentPartPr/>
+                <p14:nvPr/>
+              </p14:nvContentPartPr>
+              <p14:xfrm>
+                <a:off x="7134165" y="6015675"/>
+                <a:ext cx="973440" cy="191880"/>
+              </p14:xfrm>
+            </p:contentPart>
+          </mc:Choice>
+          <mc:Fallback>
+            <p:pic>
+              <p:nvPicPr>
+                <p:cNvPr id="22" name="잉크 21">
+                  <a:extLst>
+                    <a:ext uri="{FF2B5EF4-FFF2-40B4-BE49-F238E27FC236}">
+                      <a16:creationId xmlns:a16="http://schemas.microsoft.com/office/drawing/2014/main" id="{E25BDAEC-F73E-0DFB-1905-8F186081D687}"/>
+                    </a:ext>
+                  </a:extLst>
+                </p:cNvPr>
+                <p:cNvPicPr/>
+                <p:nvPr/>
+              </p:nvPicPr>
+              <p:blipFill>
+                <a:blip r:embed="rId10"/>
+                <a:stretch>
+                  <a:fillRect/>
+                </a:stretch>
+              </p:blipFill>
+              <p:spPr>
+                <a:xfrm>
+                  <a:off x="7128045" y="6009555"/>
+                  <a:ext cx="985680" cy="204120"/>
+                </a:xfrm>
+                <a:prstGeom prst="rect">
+                  <a:avLst/>
+                </a:prstGeom>
+              </p:spPr>
+            </p:pic>
+          </mc:Fallback>
+        </mc:AlternateContent>
+        <mc:AlternateContent xmlns:mc="http://schemas.openxmlformats.org/markup-compatibility/2006">
+          <mc:Choice xmlns:p14="http://schemas.microsoft.com/office/powerpoint/2010/main" Requires="p14">
+            <p:contentPart p14:bwMode="auto" r:id="rId11">
+              <p14:nvContentPartPr>
+                <p14:cNvPr id="24" name="잉크 23">
+                  <a:extLst>
+                    <a:ext uri="{FF2B5EF4-FFF2-40B4-BE49-F238E27FC236}">
+                      <a16:creationId xmlns:a16="http://schemas.microsoft.com/office/drawing/2014/main" id="{0FBEE7B6-C8D3-3943-6840-49E096AE8766}"/>
+                    </a:ext>
+                  </a:extLst>
+                </p14:cNvPr>
+                <p14:cNvContentPartPr/>
+                <p14:nvPr/>
+              </p14:nvContentPartPr>
+              <p14:xfrm>
+                <a:off x="4285485" y="1923915"/>
+                <a:ext cx="3127320" cy="4611240"/>
+              </p14:xfrm>
+            </p:contentPart>
+          </mc:Choice>
+          <mc:Fallback>
+            <p:pic>
+              <p:nvPicPr>
+                <p:cNvPr id="24" name="잉크 23">
+                  <a:extLst>
+                    <a:ext uri="{FF2B5EF4-FFF2-40B4-BE49-F238E27FC236}">
+                      <a16:creationId xmlns:a16="http://schemas.microsoft.com/office/drawing/2014/main" id="{0FBEE7B6-C8D3-3943-6840-49E096AE8766}"/>
+                    </a:ext>
+                  </a:extLst>
+                </p:cNvPr>
+                <p:cNvPicPr/>
+                <p:nvPr/>
+              </p:nvPicPr>
+              <p:blipFill>
+                <a:blip r:embed="rId12"/>
+                <a:stretch>
+                  <a:fillRect/>
+                </a:stretch>
+              </p:blipFill>
+              <p:spPr>
+                <a:xfrm>
+                  <a:off x="4279365" y="1917795"/>
+                  <a:ext cx="3139560" cy="4623480"/>
+                </a:xfrm>
+                <a:prstGeom prst="rect">
+                  <a:avLst/>
+                </a:prstGeom>
+              </p:spPr>
+            </p:pic>
+          </mc:Fallback>
+        </mc:AlternateContent>
+      </p:grpSp>
+      <mc:AlternateContent xmlns:mc="http://schemas.openxmlformats.org/markup-compatibility/2006">
+        <mc:Choice xmlns:p14="http://schemas.microsoft.com/office/powerpoint/2010/main" Requires="p14">
+          <p:contentPart p14:bwMode="auto" r:id="rId13">
+            <p14:nvContentPartPr>
+              <p14:cNvPr id="26" name="잉크 25">
+                <a:extLst>
+                  <a:ext uri="{FF2B5EF4-FFF2-40B4-BE49-F238E27FC236}">
+                    <a16:creationId xmlns:a16="http://schemas.microsoft.com/office/drawing/2014/main" id="{8A5C2283-0352-052D-B9EF-998D699D251C}"/>
+                  </a:ext>
+                </a:extLst>
+              </p14:cNvPr>
+              <p14:cNvContentPartPr/>
+              <p14:nvPr/>
+            </p14:nvContentPartPr>
+            <p14:xfrm>
+              <a:off x="1847925" y="4762515"/>
+              <a:ext cx="360" cy="360"/>
+            </p14:xfrm>
+          </p:contentPart>
+        </mc:Choice>
+        <mc:Fallback>
+          <p:pic>
+            <p:nvPicPr>
+              <p:cNvPr id="26" name="잉크 25">
+                <a:extLst>
+                  <a:ext uri="{FF2B5EF4-FFF2-40B4-BE49-F238E27FC236}">
+                    <a16:creationId xmlns:a16="http://schemas.microsoft.com/office/drawing/2014/main" id="{8A5C2283-0352-052D-B9EF-998D699D251C}"/>
+                  </a:ext>
+                </a:extLst>
+              </p:cNvPr>
+              <p:cNvPicPr/>
+              <p:nvPr/>
+            </p:nvPicPr>
+            <p:blipFill>
+              <a:blip r:embed="rId14"/>
+              <a:stretch>
+                <a:fillRect/>
+              </a:stretch>
+            </p:blipFill>
+            <p:spPr>
+              <a:xfrm>
+                <a:off x="1841805" y="4756395"/>
+                <a:ext cx="12600" cy="12600"/>
+              </a:xfrm>
+              <a:prstGeom prst="rect">
+                <a:avLst/>
+              </a:prstGeom>
+            </p:spPr>
+          </p:pic>
+        </mc:Fallback>
+      </mc:AlternateContent>
+      <p:pic>
+        <p:nvPicPr>
+          <p:cNvPr id="28" name="그림 27" descr="폰트, 라인, 화이트, 도표이(가) 표시된 사진&#10;&#10;AI 생성 콘텐츠는 정확하지 않을 수 있습니다.">
+            <a:extLst>
+              <a:ext uri="{FF2B5EF4-FFF2-40B4-BE49-F238E27FC236}">
+                <a16:creationId xmlns:a16="http://schemas.microsoft.com/office/drawing/2014/main" id="{D3610A6D-98A1-61A7-CD0B-F90479CB349C}"/>
+              </a:ext>
+            </a:extLst>
+          </p:cNvPr>
+          <p:cNvPicPr>
+            <a:picLocks noChangeAspect="1"/>
+          </p:cNvPicPr>
+          <p:nvPr/>
+        </p:nvPicPr>
+        <p:blipFill>
+          <a:blip r:embed="rId15"/>
+          <a:stretch>
+            <a:fillRect/>
+          </a:stretch>
+        </p:blipFill>
+        <p:spPr>
+          <a:xfrm>
+            <a:off x="685567" y="3971830"/>
+            <a:ext cx="3334215" cy="790685"/>
+          </a:xfrm>
+          <a:prstGeom prst="rect">
+            <a:avLst/>
+          </a:prstGeom>
+        </p:spPr>
+      </p:pic>
+      <p:pic>
+        <p:nvPicPr>
+          <p:cNvPr id="29" name="그림 28" descr="친필, 폰트, 텍스트이(가) 표시된 사진&#10;&#10;AI 생성 콘텐츠는 정확하지 않을 수 있습니다.">
+            <a:extLst>
+              <a:ext uri="{FF2B5EF4-FFF2-40B4-BE49-F238E27FC236}">
+                <a16:creationId xmlns:a16="http://schemas.microsoft.com/office/drawing/2014/main" id="{2044FC4A-6128-C17E-44BC-D3135EC9A722}"/>
+              </a:ext>
+            </a:extLst>
+          </p:cNvPr>
+          <p:cNvPicPr>
+            <a:picLocks noChangeAspect="1"/>
+          </p:cNvPicPr>
+          <p:nvPr/>
+        </p:nvPicPr>
+        <p:blipFill>
+          <a:blip r:embed="rId16"/>
+          <a:stretch>
+            <a:fillRect/>
+          </a:stretch>
+        </p:blipFill>
+        <p:spPr>
+          <a:xfrm>
+            <a:off x="7812330" y="1117388"/>
+            <a:ext cx="3460831" cy="1461588"/>
+          </a:xfrm>
+          <a:prstGeom prst="rect">
+            <a:avLst/>
+          </a:prstGeom>
+        </p:spPr>
+      </p:pic>
+      <mc:AlternateContent xmlns:mc="http://schemas.openxmlformats.org/markup-compatibility/2006">
+        <mc:Choice xmlns:p14="http://schemas.microsoft.com/office/powerpoint/2010/main" Requires="p14">
+          <p:contentPart p14:bwMode="auto" r:id="rId17">
+            <p14:nvContentPartPr>
+              <p14:cNvPr id="31" name="잉크 30">
+                <a:extLst>
+                  <a:ext uri="{FF2B5EF4-FFF2-40B4-BE49-F238E27FC236}">
+                    <a16:creationId xmlns:a16="http://schemas.microsoft.com/office/drawing/2014/main" id="{B19AD4A3-FB82-B0A5-96E5-CE1283137074}"/>
+                  </a:ext>
+                </a:extLst>
+              </p14:cNvPr>
+              <p14:cNvContentPartPr/>
+              <p14:nvPr/>
+            </p14:nvContentPartPr>
+            <p14:xfrm>
+              <a:off x="2733165" y="4245195"/>
+              <a:ext cx="468360" cy="468720"/>
+            </p14:xfrm>
+          </p:contentPart>
+        </mc:Choice>
+        <mc:Fallback>
+          <p:pic>
+            <p:nvPicPr>
+              <p:cNvPr id="31" name="잉크 30">
+                <a:extLst>
+                  <a:ext uri="{FF2B5EF4-FFF2-40B4-BE49-F238E27FC236}">
+                    <a16:creationId xmlns:a16="http://schemas.microsoft.com/office/drawing/2014/main" id="{B19AD4A3-FB82-B0A5-96E5-CE1283137074}"/>
+                  </a:ext>
+                </a:extLst>
+              </p:cNvPr>
+              <p:cNvPicPr/>
+              <p:nvPr/>
+            </p:nvPicPr>
+            <p:blipFill>
+              <a:blip r:embed="rId18"/>
+              <a:stretch>
+                <a:fillRect/>
+              </a:stretch>
+            </p:blipFill>
+            <p:spPr>
+              <a:xfrm>
+                <a:off x="2727045" y="4239075"/>
+                <a:ext cx="480600" cy="480960"/>
+              </a:xfrm>
+              <a:prstGeom prst="rect">
+                <a:avLst/>
+              </a:prstGeom>
+            </p:spPr>
+          </p:pic>
+        </mc:Fallback>
+      </mc:AlternateContent>
+      <p:grpSp>
+        <p:nvGrpSpPr>
+          <p:cNvPr id="37" name="그룹 36">
+            <a:extLst>
+              <a:ext uri="{FF2B5EF4-FFF2-40B4-BE49-F238E27FC236}">
+                <a16:creationId xmlns:a16="http://schemas.microsoft.com/office/drawing/2014/main" id="{BE7F7D19-B4D7-5691-C153-8CDC93C3508D}"/>
+              </a:ext>
+            </a:extLst>
+          </p:cNvPr>
+          <p:cNvGrpSpPr/>
+          <p:nvPr/>
+        </p:nvGrpSpPr>
+        <p:grpSpPr>
+          <a:xfrm>
+            <a:off x="2771685" y="4810035"/>
+            <a:ext cx="454320" cy="335880"/>
+            <a:chOff x="2771685" y="4810035"/>
+            <a:chExt cx="454320" cy="335880"/>
+          </a:xfrm>
+        </p:grpSpPr>
+        <mc:AlternateContent xmlns:mc="http://schemas.openxmlformats.org/markup-compatibility/2006">
+          <mc:Choice xmlns:p14="http://schemas.microsoft.com/office/powerpoint/2010/main" Requires="p14">
+            <p:contentPart p14:bwMode="auto" r:id="rId19">
+              <p14:nvContentPartPr>
+                <p14:cNvPr id="32" name="잉크 31">
+                  <a:extLst>
+                    <a:ext uri="{FF2B5EF4-FFF2-40B4-BE49-F238E27FC236}">
+                      <a16:creationId xmlns:a16="http://schemas.microsoft.com/office/drawing/2014/main" id="{B8590C12-A69B-4A86-23C4-41F901AC593C}"/>
+                    </a:ext>
+                  </a:extLst>
+                </p14:cNvPr>
+                <p14:cNvContentPartPr/>
+                <p14:nvPr/>
+              </p14:nvContentPartPr>
+              <p14:xfrm>
+                <a:off x="2771685" y="4838115"/>
+                <a:ext cx="96840" cy="123480"/>
+              </p14:xfrm>
+            </p:contentPart>
+          </mc:Choice>
+          <mc:Fallback>
+            <p:pic>
+              <p:nvPicPr>
+                <p:cNvPr id="32" name="잉크 31">
+                  <a:extLst>
+                    <a:ext uri="{FF2B5EF4-FFF2-40B4-BE49-F238E27FC236}">
+                      <a16:creationId xmlns:a16="http://schemas.microsoft.com/office/drawing/2014/main" id="{B8590C12-A69B-4A86-23C4-41F901AC593C}"/>
+                    </a:ext>
+                  </a:extLst>
+                </p:cNvPr>
+                <p:cNvPicPr/>
+                <p:nvPr/>
+              </p:nvPicPr>
+              <p:blipFill>
+                <a:blip r:embed="rId20"/>
+                <a:stretch>
+                  <a:fillRect/>
+                </a:stretch>
+              </p:blipFill>
+              <p:spPr>
+                <a:xfrm>
+                  <a:off x="2765565" y="4831995"/>
+                  <a:ext cx="109080" cy="135720"/>
+                </a:xfrm>
+                <a:prstGeom prst="rect">
+                  <a:avLst/>
+                </a:prstGeom>
+              </p:spPr>
+            </p:pic>
+          </mc:Fallback>
+        </mc:AlternateContent>
+        <mc:AlternateContent xmlns:mc="http://schemas.openxmlformats.org/markup-compatibility/2006">
+          <mc:Choice xmlns:p14="http://schemas.microsoft.com/office/powerpoint/2010/main" Requires="p14">
+            <p:contentPart p14:bwMode="auto" r:id="rId21">
+              <p14:nvContentPartPr>
+                <p14:cNvPr id="33" name="잉크 32">
+                  <a:extLst>
+                    <a:ext uri="{FF2B5EF4-FFF2-40B4-BE49-F238E27FC236}">
+                      <a16:creationId xmlns:a16="http://schemas.microsoft.com/office/drawing/2014/main" id="{A2BE2746-4FB5-0CC4-B561-466C1CFFA7B8}"/>
+                    </a:ext>
+                  </a:extLst>
+                </p14:cNvPr>
+                <p14:cNvContentPartPr/>
+                <p14:nvPr/>
+              </p14:nvContentPartPr>
+              <p14:xfrm>
+                <a:off x="2800125" y="4925955"/>
+                <a:ext cx="77400" cy="17640"/>
+              </p14:xfrm>
+            </p:contentPart>
+          </mc:Choice>
+          <mc:Fallback>
+            <p:pic>
+              <p:nvPicPr>
+                <p:cNvPr id="33" name="잉크 32">
+                  <a:extLst>
+                    <a:ext uri="{FF2B5EF4-FFF2-40B4-BE49-F238E27FC236}">
+                      <a16:creationId xmlns:a16="http://schemas.microsoft.com/office/drawing/2014/main" id="{A2BE2746-4FB5-0CC4-B561-466C1CFFA7B8}"/>
+                    </a:ext>
+                  </a:extLst>
+                </p:cNvPr>
+                <p:cNvPicPr/>
+                <p:nvPr/>
+              </p:nvPicPr>
+              <p:blipFill>
+                <a:blip r:embed="rId22"/>
+                <a:stretch>
+                  <a:fillRect/>
+                </a:stretch>
+              </p:blipFill>
+              <p:spPr>
+                <a:xfrm>
+                  <a:off x="2794005" y="4919835"/>
+                  <a:ext cx="89640" cy="29880"/>
+                </a:xfrm>
+                <a:prstGeom prst="rect">
+                  <a:avLst/>
+                </a:prstGeom>
+              </p:spPr>
+            </p:pic>
+          </mc:Fallback>
+        </mc:AlternateContent>
+        <mc:AlternateContent xmlns:mc="http://schemas.openxmlformats.org/markup-compatibility/2006">
+          <mc:Choice xmlns:p14="http://schemas.microsoft.com/office/powerpoint/2010/main" Requires="p14">
+            <p:contentPart p14:bwMode="auto" r:id="rId23">
+              <p14:nvContentPartPr>
+                <p14:cNvPr id="34" name="잉크 33">
+                  <a:extLst>
+                    <a:ext uri="{FF2B5EF4-FFF2-40B4-BE49-F238E27FC236}">
+                      <a16:creationId xmlns:a16="http://schemas.microsoft.com/office/drawing/2014/main" id="{55FA4790-6BEF-8C91-F8A4-90CB17020104}"/>
+                    </a:ext>
+                  </a:extLst>
+                </p14:cNvPr>
+                <p14:cNvContentPartPr/>
+                <p14:nvPr/>
+              </p14:nvContentPartPr>
+              <p14:xfrm>
+                <a:off x="2781405" y="5028915"/>
+                <a:ext cx="160920" cy="360"/>
+              </p14:xfrm>
+            </p:contentPart>
+          </mc:Choice>
+          <mc:Fallback>
+            <p:pic>
+              <p:nvPicPr>
+                <p:cNvPr id="34" name="잉크 33">
+                  <a:extLst>
+                    <a:ext uri="{FF2B5EF4-FFF2-40B4-BE49-F238E27FC236}">
+                      <a16:creationId xmlns:a16="http://schemas.microsoft.com/office/drawing/2014/main" id="{55FA4790-6BEF-8C91-F8A4-90CB17020104}"/>
+                    </a:ext>
+                  </a:extLst>
+                </p:cNvPr>
+                <p:cNvPicPr/>
+                <p:nvPr/>
+              </p:nvPicPr>
+              <p:blipFill>
+                <a:blip r:embed="rId24"/>
+                <a:stretch>
+                  <a:fillRect/>
+                </a:stretch>
+              </p:blipFill>
+              <p:spPr>
+                <a:xfrm>
+                  <a:off x="2775285" y="5022795"/>
+                  <a:ext cx="173160" cy="12600"/>
+                </a:xfrm>
+                <a:prstGeom prst="rect">
+                  <a:avLst/>
+                </a:prstGeom>
+              </p:spPr>
+            </p:pic>
+          </mc:Fallback>
+        </mc:AlternateContent>
+        <mc:AlternateContent xmlns:mc="http://schemas.openxmlformats.org/markup-compatibility/2006">
+          <mc:Choice xmlns:p14="http://schemas.microsoft.com/office/powerpoint/2010/main" Requires="p14">
+            <p:contentPart p14:bwMode="auto" r:id="rId25">
+              <p14:nvContentPartPr>
+                <p14:cNvPr id="35" name="잉크 34">
+                  <a:extLst>
+                    <a:ext uri="{FF2B5EF4-FFF2-40B4-BE49-F238E27FC236}">
+                      <a16:creationId xmlns:a16="http://schemas.microsoft.com/office/drawing/2014/main" id="{8AB2246B-649A-96B6-69C7-EA56689BAC4A}"/>
+                    </a:ext>
+                  </a:extLst>
+                </p14:cNvPr>
+                <p14:cNvContentPartPr/>
+                <p14:nvPr/>
+              </p14:nvContentPartPr>
+              <p14:xfrm>
+                <a:off x="2962125" y="4856835"/>
+                <a:ext cx="136080" cy="132840"/>
+              </p14:xfrm>
+            </p:contentPart>
+          </mc:Choice>
+          <mc:Fallback>
+            <p:pic>
+              <p:nvPicPr>
+                <p:cNvPr id="35" name="잉크 34">
+                  <a:extLst>
+                    <a:ext uri="{FF2B5EF4-FFF2-40B4-BE49-F238E27FC236}">
+                      <a16:creationId xmlns:a16="http://schemas.microsoft.com/office/drawing/2014/main" id="{8AB2246B-649A-96B6-69C7-EA56689BAC4A}"/>
+                    </a:ext>
+                  </a:extLst>
+                </p:cNvPr>
+                <p:cNvPicPr/>
+                <p:nvPr/>
+              </p:nvPicPr>
+              <p:blipFill>
+                <a:blip r:embed="rId26"/>
+                <a:stretch>
+                  <a:fillRect/>
+                </a:stretch>
+              </p:blipFill>
+              <p:spPr>
+                <a:xfrm>
+                  <a:off x="2956005" y="4850715"/>
+                  <a:ext cx="148320" cy="145080"/>
+                </a:xfrm>
+                <a:prstGeom prst="rect">
+                  <a:avLst/>
+                </a:prstGeom>
+              </p:spPr>
+            </p:pic>
+          </mc:Fallback>
+        </mc:AlternateContent>
+        <mc:AlternateContent xmlns:mc="http://schemas.openxmlformats.org/markup-compatibility/2006">
+          <mc:Choice xmlns:p14="http://schemas.microsoft.com/office/powerpoint/2010/main" Requires="p14">
+            <p:contentPart p14:bwMode="auto" r:id="rId27">
+              <p14:nvContentPartPr>
+                <p14:cNvPr id="36" name="잉크 35">
+                  <a:extLst>
+                    <a:ext uri="{FF2B5EF4-FFF2-40B4-BE49-F238E27FC236}">
+                      <a16:creationId xmlns:a16="http://schemas.microsoft.com/office/drawing/2014/main" id="{1A38C020-C9A1-E167-DA2C-0B34E8250464}"/>
+                    </a:ext>
+                  </a:extLst>
+                </p14:cNvPr>
+                <p14:cNvContentPartPr/>
+                <p14:nvPr/>
+              </p14:nvContentPartPr>
+              <p14:xfrm>
+                <a:off x="3171645" y="4810035"/>
+                <a:ext cx="54360" cy="335880"/>
+              </p14:xfrm>
+            </p:contentPart>
+          </mc:Choice>
+          <mc:Fallback>
+            <p:pic>
+              <p:nvPicPr>
+                <p:cNvPr id="36" name="잉크 35">
+                  <a:extLst>
+                    <a:ext uri="{FF2B5EF4-FFF2-40B4-BE49-F238E27FC236}">
+                      <a16:creationId xmlns:a16="http://schemas.microsoft.com/office/drawing/2014/main" id="{1A38C020-C9A1-E167-DA2C-0B34E8250464}"/>
+                    </a:ext>
+                  </a:extLst>
+                </p:cNvPr>
+                <p:cNvPicPr/>
+                <p:nvPr/>
+              </p:nvPicPr>
+              <p:blipFill>
+                <a:blip r:embed="rId28"/>
+                <a:stretch>
+                  <a:fillRect/>
+                </a:stretch>
+              </p:blipFill>
+              <p:spPr>
+                <a:xfrm>
+                  <a:off x="3165525" y="4803915"/>
+                  <a:ext cx="66600" cy="348120"/>
+                </a:xfrm>
+                <a:prstGeom prst="rect">
+                  <a:avLst/>
+                </a:prstGeom>
+              </p:spPr>
+            </p:pic>
+          </mc:Fallback>
+        </mc:AlternateContent>
+      </p:grpSp>
+      <mc:AlternateContent xmlns:mc="http://schemas.openxmlformats.org/markup-compatibility/2006">
+        <mc:Choice xmlns:p14="http://schemas.microsoft.com/office/powerpoint/2010/main" Requires="p14">
+          <p:contentPart p14:bwMode="auto" r:id="rId29">
+            <p14:nvContentPartPr>
+              <p14:cNvPr id="39" name="잉크 38">
+                <a:extLst>
+                  <a:ext uri="{FF2B5EF4-FFF2-40B4-BE49-F238E27FC236}">
+                    <a16:creationId xmlns:a16="http://schemas.microsoft.com/office/drawing/2014/main" id="{1E686C3A-F53B-64CB-3D13-8E7BC40F3BC4}"/>
+                  </a:ext>
+                </a:extLst>
+              </p14:cNvPr>
+              <p14:cNvContentPartPr/>
+              <p14:nvPr/>
+            </p14:nvContentPartPr>
+            <p14:xfrm>
+              <a:off x="3591045" y="4628955"/>
+              <a:ext cx="266760" cy="360"/>
+            </p14:xfrm>
+          </p:contentPart>
+        </mc:Choice>
+        <mc:Fallback>
+          <p:pic>
+            <p:nvPicPr>
+              <p:cNvPr id="39" name="잉크 38">
+                <a:extLst>
+                  <a:ext uri="{FF2B5EF4-FFF2-40B4-BE49-F238E27FC236}">
+                    <a16:creationId xmlns:a16="http://schemas.microsoft.com/office/drawing/2014/main" id="{1E686C3A-F53B-64CB-3D13-8E7BC40F3BC4}"/>
+                  </a:ext>
+                </a:extLst>
+              </p:cNvPr>
+              <p:cNvPicPr/>
+              <p:nvPr/>
+            </p:nvPicPr>
+            <p:blipFill>
+              <a:blip r:embed="rId30"/>
+              <a:stretch>
+                <a:fillRect/>
+              </a:stretch>
+            </p:blipFill>
+            <p:spPr>
+              <a:xfrm>
+                <a:off x="3584925" y="4622835"/>
+                <a:ext cx="279000" cy="12600"/>
+              </a:xfrm>
+              <a:prstGeom prst="rect">
+                <a:avLst/>
+              </a:prstGeom>
+            </p:spPr>
+          </p:pic>
+        </mc:Fallback>
+      </mc:AlternateContent>
+      <mc:AlternateContent xmlns:mc="http://schemas.openxmlformats.org/markup-compatibility/2006">
+        <mc:Choice xmlns:p14="http://schemas.microsoft.com/office/powerpoint/2010/main" Requires="p14">
+          <p:contentPart p14:bwMode="auto" r:id="rId31">
+            <p14:nvContentPartPr>
+              <p14:cNvPr id="40" name="잉크 39">
+                <a:extLst>
+                  <a:ext uri="{FF2B5EF4-FFF2-40B4-BE49-F238E27FC236}">
+                    <a16:creationId xmlns:a16="http://schemas.microsoft.com/office/drawing/2014/main" id="{01702448-CFA1-D97B-6775-23EC0B8AA673}"/>
+                  </a:ext>
+                </a:extLst>
+              </p14:cNvPr>
+              <p14:cNvContentPartPr/>
+              <p14:nvPr/>
+            </p14:nvContentPartPr>
+            <p14:xfrm>
+              <a:off x="3676725" y="4857555"/>
+              <a:ext cx="37800" cy="256320"/>
+            </p14:xfrm>
+          </p:contentPart>
+        </mc:Choice>
+        <mc:Fallback>
+          <p:pic>
+            <p:nvPicPr>
+              <p:cNvPr id="40" name="잉크 39">
+                <a:extLst>
+                  <a:ext uri="{FF2B5EF4-FFF2-40B4-BE49-F238E27FC236}">
+                    <a16:creationId xmlns:a16="http://schemas.microsoft.com/office/drawing/2014/main" id="{01702448-CFA1-D97B-6775-23EC0B8AA673}"/>
+                  </a:ext>
+                </a:extLst>
+              </p:cNvPr>
+              <p:cNvPicPr/>
+              <p:nvPr/>
+            </p:nvPicPr>
+            <p:blipFill>
+              <a:blip r:embed="rId32"/>
+              <a:stretch>
+                <a:fillRect/>
+              </a:stretch>
+            </p:blipFill>
+            <p:spPr>
+              <a:xfrm>
+                <a:off x="3670605" y="4851435"/>
+                <a:ext cx="50040" cy="268560"/>
+              </a:xfrm>
+              <a:prstGeom prst="rect">
+                <a:avLst/>
+              </a:prstGeom>
+            </p:spPr>
+          </p:pic>
+        </mc:Fallback>
+      </mc:AlternateContent>
+      <mc:AlternateContent xmlns:mc="http://schemas.openxmlformats.org/markup-compatibility/2006">
+        <mc:Choice xmlns:p14="http://schemas.microsoft.com/office/powerpoint/2010/main" Requires="p14">
+          <p:contentPart p14:bwMode="auto" r:id="rId33">
+            <p14:nvContentPartPr>
+              <p14:cNvPr id="41" name="잉크 40">
+                <a:extLst>
+                  <a:ext uri="{FF2B5EF4-FFF2-40B4-BE49-F238E27FC236}">
+                    <a16:creationId xmlns:a16="http://schemas.microsoft.com/office/drawing/2014/main" id="{887B73B1-788A-5F6F-8103-9F1E5F4A1457}"/>
+                  </a:ext>
+                </a:extLst>
+              </p14:cNvPr>
+              <p14:cNvContentPartPr/>
+              <p14:nvPr/>
+            </p14:nvContentPartPr>
+            <p14:xfrm>
+              <a:off x="3779325" y="4907235"/>
+              <a:ext cx="252360" cy="241920"/>
+            </p14:xfrm>
+          </p:contentPart>
+        </mc:Choice>
+        <mc:Fallback>
+          <p:pic>
+            <p:nvPicPr>
+              <p:cNvPr id="41" name="잉크 40">
+                <a:extLst>
+                  <a:ext uri="{FF2B5EF4-FFF2-40B4-BE49-F238E27FC236}">
+                    <a16:creationId xmlns:a16="http://schemas.microsoft.com/office/drawing/2014/main" id="{887B73B1-788A-5F6F-8103-9F1E5F4A1457}"/>
+                  </a:ext>
+                </a:extLst>
+              </p:cNvPr>
+              <p:cNvPicPr/>
+              <p:nvPr/>
+            </p:nvPicPr>
+            <p:blipFill>
+              <a:blip r:embed="rId34"/>
+              <a:stretch>
+                <a:fillRect/>
+              </a:stretch>
+            </p:blipFill>
+            <p:spPr>
+              <a:xfrm>
+                <a:off x="3773205" y="4901115"/>
+                <a:ext cx="264600" cy="254160"/>
+              </a:xfrm>
+              <a:prstGeom prst="rect">
+                <a:avLst/>
+              </a:prstGeom>
+            </p:spPr>
+          </p:pic>
+        </mc:Fallback>
+      </mc:AlternateContent>
+      <mc:AlternateContent xmlns:mc="http://schemas.openxmlformats.org/markup-compatibility/2006">
+        <mc:Choice xmlns:p14="http://schemas.microsoft.com/office/powerpoint/2010/main" Requires="p14">
+          <p:contentPart p14:bwMode="auto" r:id="rId35">
+            <p14:nvContentPartPr>
+              <p14:cNvPr id="42" name="잉크 41">
+                <a:extLst>
+                  <a:ext uri="{FF2B5EF4-FFF2-40B4-BE49-F238E27FC236}">
+                    <a16:creationId xmlns:a16="http://schemas.microsoft.com/office/drawing/2014/main" id="{E4939DE3-8E1A-66AC-F1A9-FECC857AEA85}"/>
+                  </a:ext>
+                </a:extLst>
+              </p14:cNvPr>
+              <p14:cNvContentPartPr/>
+              <p14:nvPr/>
+            </p14:nvContentPartPr>
+            <p14:xfrm>
+              <a:off x="3867165" y="4762515"/>
+              <a:ext cx="103680" cy="19080"/>
+            </p14:xfrm>
+          </p:contentPart>
+        </mc:Choice>
+        <mc:Fallback>
+          <p:pic>
+            <p:nvPicPr>
+              <p:cNvPr id="42" name="잉크 41">
+                <a:extLst>
+                  <a:ext uri="{FF2B5EF4-FFF2-40B4-BE49-F238E27FC236}">
+                    <a16:creationId xmlns:a16="http://schemas.microsoft.com/office/drawing/2014/main" id="{E4939DE3-8E1A-66AC-F1A9-FECC857AEA85}"/>
+                  </a:ext>
+                </a:extLst>
+              </p:cNvPr>
+              <p:cNvPicPr/>
+              <p:nvPr/>
+            </p:nvPicPr>
+            <p:blipFill>
+              <a:blip r:embed="rId36"/>
+              <a:stretch>
+                <a:fillRect/>
+              </a:stretch>
+            </p:blipFill>
+            <p:spPr>
+              <a:xfrm>
+                <a:off x="3861045" y="4756395"/>
+                <a:ext cx="115920" cy="31320"/>
+              </a:xfrm>
+              <a:prstGeom prst="rect">
+                <a:avLst/>
+              </a:prstGeom>
+            </p:spPr>
+          </p:pic>
+        </mc:Fallback>
+      </mc:AlternateContent>
+      <mc:AlternateContent xmlns:mc="http://schemas.openxmlformats.org/markup-compatibility/2006">
+        <mc:Choice xmlns:p14="http://schemas.microsoft.com/office/powerpoint/2010/main" Requires="p14">
+          <p:contentPart p14:bwMode="auto" r:id="rId37">
+            <p14:nvContentPartPr>
+              <p14:cNvPr id="43" name="잉크 42">
+                <a:extLst>
+                  <a:ext uri="{FF2B5EF4-FFF2-40B4-BE49-F238E27FC236}">
+                    <a16:creationId xmlns:a16="http://schemas.microsoft.com/office/drawing/2014/main" id="{7E91B08B-A1F3-966F-FF5B-D668C8DF817A}"/>
+                  </a:ext>
+                </a:extLst>
+              </p14:cNvPr>
+              <p14:cNvContentPartPr/>
+              <p14:nvPr/>
+            </p14:nvContentPartPr>
+            <p14:xfrm>
+              <a:off x="3975165" y="4628955"/>
+              <a:ext cx="235080" cy="241200"/>
+            </p14:xfrm>
+          </p:contentPart>
+        </mc:Choice>
+        <mc:Fallback>
+          <p:pic>
+            <p:nvPicPr>
+              <p:cNvPr id="43" name="잉크 42">
+                <a:extLst>
+                  <a:ext uri="{FF2B5EF4-FFF2-40B4-BE49-F238E27FC236}">
+                    <a16:creationId xmlns:a16="http://schemas.microsoft.com/office/drawing/2014/main" id="{7E91B08B-A1F3-966F-FF5B-D668C8DF817A}"/>
+                  </a:ext>
+                </a:extLst>
+              </p:cNvPr>
+              <p:cNvPicPr/>
+              <p:nvPr/>
+            </p:nvPicPr>
+            <p:blipFill>
+              <a:blip r:embed="rId38"/>
+              <a:stretch>
+                <a:fillRect/>
+              </a:stretch>
+            </p:blipFill>
+            <p:spPr>
+              <a:xfrm>
+                <a:off x="3969045" y="4622835"/>
+                <a:ext cx="247320" cy="253440"/>
+              </a:xfrm>
+              <a:prstGeom prst="rect">
+                <a:avLst/>
+              </a:prstGeom>
+            </p:spPr>
+          </p:pic>
+        </mc:Fallback>
+      </mc:AlternateContent>
+    </p:spTree>
+    <p:extLst>
+      <p:ext uri="{BB962C8B-B14F-4D97-AF65-F5344CB8AC3E}">
+        <p14:creationId xmlns:p14="http://schemas.microsoft.com/office/powerpoint/2010/main" val="138282056"/>
+      </p:ext>
+    </p:extLst>
+  </p:cSld>
+  <p:clrMapOvr>
+    <a:masterClrMapping/>
+  </p:clrMapOvr>
+</p:sld>
+</file>
+
+<file path=ppt/slides/slide34.xml><?xml version="1.0" encoding="utf-8"?>
 <p:sld xmlns:a="http://schemas.openxmlformats.org/drawingml/2006/main" xmlns:r="http://schemas.openxmlformats.org/officeDocument/2006/relationships" xmlns:p="http://schemas.openxmlformats.org/presentationml/2006/main">
   <p:cSld>
     <p:spTree>
@@ -17099,7 +19673,7 @@
         </p:blipFill>
         <p:spPr>
           <a:xfrm>
-            <a:off x="3495742" y="1204894"/>
+            <a:off x="3432242" y="1757915"/>
             <a:ext cx="3042315" cy="882403"/>
           </a:xfrm>
           <a:prstGeom prst="rect">
@@ -17129,68 +19703,8 @@
         </p:blipFill>
         <p:spPr>
           <a:xfrm>
-            <a:off x="7049829" y="1091175"/>
+            <a:off x="7049829" y="1757915"/>
             <a:ext cx="3405662" cy="996122"/>
-          </a:xfrm>
-          <a:prstGeom prst="rect">
-            <a:avLst/>
-          </a:prstGeom>
-        </p:spPr>
-      </p:pic>
-      <p:pic>
-        <p:nvPicPr>
-          <p:cNvPr id="10" name="그림 9" descr="라인, 도표, 종이접기이(가) 표시된 사진&#10;&#10;AI 생성 콘텐츠는 정확하지 않을 수 있습니다.">
-            <a:extLst>
-              <a:ext uri="{FF2B5EF4-FFF2-40B4-BE49-F238E27FC236}">
-                <a16:creationId xmlns:a16="http://schemas.microsoft.com/office/drawing/2014/main" id="{D8604D09-2008-5CDB-E810-38404E5C2B7D}"/>
-              </a:ext>
-            </a:extLst>
-          </p:cNvPr>
-          <p:cNvPicPr>
-            <a:picLocks noChangeAspect="1"/>
-          </p:cNvPicPr>
-          <p:nvPr/>
-        </p:nvPicPr>
-        <p:blipFill>
-          <a:blip r:embed="rId4"/>
-          <a:stretch>
-            <a:fillRect/>
-          </a:stretch>
-        </p:blipFill>
-        <p:spPr>
-          <a:xfrm>
-            <a:off x="3495742" y="3949834"/>
-            <a:ext cx="2142583" cy="1955647"/>
-          </a:xfrm>
-          <a:prstGeom prst="rect">
-            <a:avLst/>
-          </a:prstGeom>
-        </p:spPr>
-      </p:pic>
-      <p:pic>
-        <p:nvPicPr>
-          <p:cNvPr id="13" name="그림 12" descr="라인, 도표, 스케치이(가) 표시된 사진&#10;&#10;AI 생성 콘텐츠는 정확하지 않을 수 있습니다.">
-            <a:extLst>
-              <a:ext uri="{FF2B5EF4-FFF2-40B4-BE49-F238E27FC236}">
-                <a16:creationId xmlns:a16="http://schemas.microsoft.com/office/drawing/2014/main" id="{FD91174C-8E0E-2BD8-DA6B-B0576ACADD33}"/>
-              </a:ext>
-            </a:extLst>
-          </p:cNvPr>
-          <p:cNvPicPr>
-            <a:picLocks noChangeAspect="1"/>
-          </p:cNvPicPr>
-          <p:nvPr/>
-        </p:nvPicPr>
-        <p:blipFill>
-          <a:blip r:embed="rId5"/>
-          <a:stretch>
-            <a:fillRect/>
-          </a:stretch>
-        </p:blipFill>
-        <p:spPr>
-          <a:xfrm>
-            <a:off x="7698063" y="3949834"/>
-            <a:ext cx="2168951" cy="1691892"/>
           </a:xfrm>
           <a:prstGeom prst="rect">
             <a:avLst/>
@@ -17212,13 +19726,13 @@
           <p:nvPr>
             <p:extLst>
               <p:ext uri="{D42A27DB-BD31-4B8C-83A1-F6EECF244321}">
-                <p14:modId xmlns:p14="http://schemas.microsoft.com/office/powerpoint/2010/main" val="2318829161"/>
+                <p14:modId xmlns:p14="http://schemas.microsoft.com/office/powerpoint/2010/main" val="290102830"/>
               </p:ext>
             </p:extLst>
           </p:nvPr>
         </p:nvGraphicFramePr>
         <p:xfrm>
-          <a:off x="1163053" y="2143446"/>
+          <a:off x="1230535" y="2926664"/>
           <a:ext cx="9224956" cy="1844040"/>
         </p:xfrm>
         <a:graphic>
@@ -17542,7 +20056,476 @@
 </p:sld>
 </file>
 
-<file path=ppt/slides/slide33.xml><?xml version="1.0" encoding="utf-8"?>
+<file path=ppt/slides/slide35.xml><?xml version="1.0" encoding="utf-8"?>
+<p:sld xmlns:a="http://schemas.openxmlformats.org/drawingml/2006/main" xmlns:r="http://schemas.openxmlformats.org/officeDocument/2006/relationships" xmlns:p="http://schemas.openxmlformats.org/presentationml/2006/main">
+  <p:cSld>
+    <p:spTree>
+      <p:nvGrpSpPr>
+        <p:cNvPr id="1" name="">
+          <a:extLst>
+            <a:ext uri="{FF2B5EF4-FFF2-40B4-BE49-F238E27FC236}">
+              <a16:creationId xmlns:a16="http://schemas.microsoft.com/office/drawing/2014/main" id="{2C6BDA2C-0928-BA66-F443-F17B4299E760}"/>
+            </a:ext>
+          </a:extLst>
+        </p:cNvPr>
+        <p:cNvGrpSpPr/>
+        <p:nvPr/>
+      </p:nvGrpSpPr>
+      <p:grpSpPr>
+        <a:xfrm>
+          <a:off x="0" y="0"/>
+          <a:ext cx="0" cy="0"/>
+          <a:chOff x="0" y="0"/>
+          <a:chExt cx="0" cy="0"/>
+        </a:xfrm>
+      </p:grpSpPr>
+      <p:cxnSp>
+        <p:nvCxnSpPr>
+          <p:cNvPr id="9" name="직선 연결선 8">
+            <a:extLst>
+              <a:ext uri="{FF2B5EF4-FFF2-40B4-BE49-F238E27FC236}">
+                <a16:creationId xmlns:a16="http://schemas.microsoft.com/office/drawing/2014/main" id="{80B45BCF-2755-EB3F-78D9-279A99286C01}"/>
+              </a:ext>
+            </a:extLst>
+          </p:cNvPr>
+          <p:cNvCxnSpPr/>
+          <p:nvPr/>
+        </p:nvCxnSpPr>
+        <p:spPr>
+          <a:xfrm>
+            <a:off x="144378" y="160422"/>
+            <a:ext cx="12060000" cy="0"/>
+          </a:xfrm>
+          <a:prstGeom prst="line">
+            <a:avLst/>
+          </a:prstGeom>
+          <a:ln w="57150"/>
+        </p:spPr>
+        <p:style>
+          <a:lnRef idx="1">
+            <a:schemeClr val="accent4"/>
+          </a:lnRef>
+          <a:fillRef idx="0">
+            <a:schemeClr val="accent4"/>
+          </a:fillRef>
+          <a:effectRef idx="0">
+            <a:schemeClr val="accent4"/>
+          </a:effectRef>
+          <a:fontRef idx="minor">
+            <a:schemeClr val="tx1"/>
+          </a:fontRef>
+        </p:style>
+      </p:cxnSp>
+      <p:cxnSp>
+        <p:nvCxnSpPr>
+          <p:cNvPr id="11" name="직선 연결선 10">
+            <a:extLst>
+              <a:ext uri="{FF2B5EF4-FFF2-40B4-BE49-F238E27FC236}">
+                <a16:creationId xmlns:a16="http://schemas.microsoft.com/office/drawing/2014/main" id="{306B31C5-15FF-4984-9F24-956B44047CA8}"/>
+              </a:ext>
+            </a:extLst>
+          </p:cNvPr>
+          <p:cNvCxnSpPr/>
+          <p:nvPr/>
+        </p:nvCxnSpPr>
+        <p:spPr>
+          <a:xfrm>
+            <a:off x="64064" y="6697578"/>
+            <a:ext cx="12060000" cy="0"/>
+          </a:xfrm>
+          <a:prstGeom prst="line">
+            <a:avLst/>
+          </a:prstGeom>
+          <a:ln/>
+        </p:spPr>
+        <p:style>
+          <a:lnRef idx="1">
+            <a:schemeClr val="accent4"/>
+          </a:lnRef>
+          <a:fillRef idx="0">
+            <a:schemeClr val="accent4"/>
+          </a:fillRef>
+          <a:effectRef idx="0">
+            <a:schemeClr val="accent4"/>
+          </a:effectRef>
+          <a:fontRef idx="minor">
+            <a:schemeClr val="tx1"/>
+          </a:fontRef>
+        </p:style>
+      </p:cxnSp>
+      <p:sp>
+        <p:nvSpPr>
+          <p:cNvPr id="2" name="TextBox 1">
+            <a:extLst>
+              <a:ext uri="{FF2B5EF4-FFF2-40B4-BE49-F238E27FC236}">
+                <a16:creationId xmlns:a16="http://schemas.microsoft.com/office/drawing/2014/main" id="{1A30BBDB-AC03-010D-8FDE-7EEB2E021572}"/>
+              </a:ext>
+            </a:extLst>
+          </p:cNvPr>
+          <p:cNvSpPr txBox="1"/>
+          <p:nvPr/>
+        </p:nvSpPr>
+        <p:spPr>
+          <a:xfrm>
+            <a:off x="1163052" y="272716"/>
+            <a:ext cx="4745210" cy="523220"/>
+          </a:xfrm>
+          <a:prstGeom prst="rect">
+            <a:avLst/>
+          </a:prstGeom>
+          <a:noFill/>
+        </p:spPr>
+        <p:txBody>
+          <a:bodyPr wrap="none" rtlCol="0">
+            <a:spAutoFit/>
+          </a:bodyPr>
+          <a:lstStyle/>
+          <a:p>
+            <a:r>
+              <a:rPr lang="ko-KR" altLang="en-US" sz="2800" b="1" dirty="0">
+                <a:solidFill>
+                  <a:srgbClr val="00B0F0"/>
+                </a:solidFill>
+              </a:rPr>
+              <a:t>파라미터 </a:t>
+            </a:r>
+            <a:r>
+              <a:rPr lang="en-US" altLang="ko-KR" sz="2800" b="1" dirty="0">
+                <a:solidFill>
+                  <a:srgbClr val="00B0F0"/>
+                </a:solidFill>
+              </a:rPr>
+              <a:t>vs </a:t>
+            </a:r>
+            <a:r>
+              <a:rPr lang="ko-KR" altLang="en-US" sz="2800" b="1" dirty="0" err="1">
+                <a:solidFill>
+                  <a:srgbClr val="00B0F0"/>
+                </a:solidFill>
+              </a:rPr>
+              <a:t>하이퍼파라미터</a:t>
+            </a:r>
+            <a:endParaRPr lang="ko-KR" altLang="en-US" sz="2800" b="1" dirty="0">
+              <a:solidFill>
+                <a:srgbClr val="00B0F0"/>
+              </a:solidFill>
+            </a:endParaRPr>
+          </a:p>
+        </p:txBody>
+      </p:sp>
+      <p:sp>
+        <p:nvSpPr>
+          <p:cNvPr id="4" name="TextBox 3">
+            <a:extLst>
+              <a:ext uri="{FF2B5EF4-FFF2-40B4-BE49-F238E27FC236}">
+                <a16:creationId xmlns:a16="http://schemas.microsoft.com/office/drawing/2014/main" id="{987466FB-CDF3-EB37-86BB-58214569CF7E}"/>
+              </a:ext>
+            </a:extLst>
+          </p:cNvPr>
+          <p:cNvSpPr txBox="1"/>
+          <p:nvPr/>
+        </p:nvSpPr>
+        <p:spPr>
+          <a:xfrm>
+            <a:off x="144378" y="272716"/>
+            <a:ext cx="736997" cy="338554"/>
+          </a:xfrm>
+          <a:prstGeom prst="rect">
+            <a:avLst/>
+          </a:prstGeom>
+          <a:noFill/>
+        </p:spPr>
+        <p:txBody>
+          <a:bodyPr wrap="none" rtlCol="0">
+            <a:spAutoFit/>
+          </a:bodyPr>
+          <a:lstStyle/>
+          <a:p>
+            <a:r>
+              <a:rPr lang="en-US" altLang="ko-KR" sz="1600" dirty="0">
+                <a:solidFill>
+                  <a:srgbClr val="00B0F0"/>
+                </a:solidFill>
+              </a:rPr>
+              <a:t>Part 5</a:t>
+            </a:r>
+            <a:endParaRPr lang="ko-KR" altLang="en-US" sz="1600" dirty="0">
+              <a:solidFill>
+                <a:srgbClr val="00B0F0"/>
+              </a:solidFill>
+            </a:endParaRPr>
+          </a:p>
+        </p:txBody>
+      </p:sp>
+      <p:sp>
+        <p:nvSpPr>
+          <p:cNvPr id="3" name="TextBox 2">
+            <a:extLst>
+              <a:ext uri="{FF2B5EF4-FFF2-40B4-BE49-F238E27FC236}">
+                <a16:creationId xmlns:a16="http://schemas.microsoft.com/office/drawing/2014/main" id="{F3C994EE-3F8C-D77C-C00F-DB26DB1B6CFF}"/>
+              </a:ext>
+            </a:extLst>
+          </p:cNvPr>
+          <p:cNvSpPr txBox="1"/>
+          <p:nvPr/>
+        </p:nvSpPr>
+        <p:spPr>
+          <a:xfrm>
+            <a:off x="1533523" y="1292434"/>
+            <a:ext cx="8639175" cy="646331"/>
+          </a:xfrm>
+          <a:prstGeom prst="rect">
+            <a:avLst/>
+          </a:prstGeom>
+          <a:noFill/>
+        </p:spPr>
+        <p:txBody>
+          <a:bodyPr wrap="square" rtlCol="0">
+            <a:spAutoFit/>
+          </a:bodyPr>
+          <a:lstStyle/>
+          <a:p>
+            <a:pPr algn="ctr"/>
+            <a:r>
+              <a:rPr lang="en-US" altLang="ko-KR" sz="3600" b="1" dirty="0"/>
+              <a:t>Parameter vs Hyperparameter</a:t>
+            </a:r>
+            <a:endParaRPr lang="ko-KR" altLang="en-US" sz="3600" b="1" dirty="0"/>
+          </a:p>
+        </p:txBody>
+      </p:sp>
+      <p:sp>
+        <p:nvSpPr>
+          <p:cNvPr id="6" name="TextBox 5">
+            <a:extLst>
+              <a:ext uri="{FF2B5EF4-FFF2-40B4-BE49-F238E27FC236}">
+                <a16:creationId xmlns:a16="http://schemas.microsoft.com/office/drawing/2014/main" id="{CE98308E-C700-6C16-C698-3E7C6A53E3EC}"/>
+              </a:ext>
+            </a:extLst>
+          </p:cNvPr>
+          <p:cNvSpPr txBox="1"/>
+          <p:nvPr/>
+        </p:nvSpPr>
+        <p:spPr>
+          <a:xfrm>
+            <a:off x="1533524" y="2042041"/>
+            <a:ext cx="8639175" cy="3139321"/>
+          </a:xfrm>
+          <a:prstGeom prst="rect">
+            <a:avLst/>
+          </a:prstGeom>
+          <a:noFill/>
+        </p:spPr>
+        <p:txBody>
+          <a:bodyPr wrap="square" rtlCol="0">
+            <a:spAutoFit/>
+          </a:bodyPr>
+          <a:lstStyle/>
+          <a:p>
+            <a:pPr marL="285750" indent="-285750">
+              <a:buFont typeface="Arial" panose="020B0604020202020204" pitchFamily="34" charset="0"/>
+              <a:buChar char="•"/>
+            </a:pPr>
+            <a:r>
+              <a:rPr lang="ko-KR" altLang="en-US" dirty="0"/>
+              <a:t>파라미터 </a:t>
+            </a:r>
+            <a:r>
+              <a:rPr lang="en-US" altLang="ko-KR" dirty="0"/>
+              <a:t>(AI</a:t>
+            </a:r>
+            <a:r>
+              <a:rPr lang="ko-KR" altLang="en-US" dirty="0"/>
+              <a:t>가 스스로 알아내는 변수</a:t>
+            </a:r>
+            <a:r>
+              <a:rPr lang="en-US" altLang="ko-KR" dirty="0"/>
+              <a:t>)</a:t>
+            </a:r>
+          </a:p>
+          <a:p>
+            <a:pPr marL="742950" lvl="1" indent="-285750">
+              <a:buFont typeface="Arial" panose="020B0604020202020204" pitchFamily="34" charset="0"/>
+              <a:buChar char="•"/>
+            </a:pPr>
+            <a:r>
+              <a:rPr lang="en-US" altLang="ko-KR" dirty="0"/>
+              <a:t>Weights</a:t>
+            </a:r>
+          </a:p>
+          <a:p>
+            <a:pPr marL="742950" lvl="1" indent="-285750">
+              <a:buFont typeface="Arial" panose="020B0604020202020204" pitchFamily="34" charset="0"/>
+              <a:buChar char="•"/>
+            </a:pPr>
+            <a:r>
+              <a:rPr lang="en-US" altLang="ko-KR" dirty="0"/>
+              <a:t>Bias(</a:t>
+            </a:r>
+            <a:r>
+              <a:rPr lang="ko-KR" altLang="en-US" dirty="0"/>
+              <a:t>걍 </a:t>
+            </a:r>
+            <a:r>
+              <a:rPr lang="en-US" altLang="ko-KR" dirty="0"/>
+              <a:t>weigh</a:t>
+            </a:r>
+            <a:r>
+              <a:rPr lang="ko-KR" altLang="en-US" dirty="0"/>
+              <a:t>라고 부르기도 함</a:t>
+            </a:r>
+            <a:r>
+              <a:rPr lang="en-US" altLang="ko-KR" dirty="0"/>
+              <a:t>)</a:t>
+            </a:r>
+          </a:p>
+          <a:p>
+            <a:pPr marL="742950" lvl="1" indent="-285750">
+              <a:buFont typeface="Arial" panose="020B0604020202020204" pitchFamily="34" charset="0"/>
+              <a:buChar char="•"/>
+            </a:pPr>
+            <a:r>
+              <a:rPr lang="ko-KR" altLang="en-US" dirty="0"/>
+              <a:t>등등</a:t>
+            </a:r>
+            <a:endParaRPr lang="en-US" altLang="ko-KR" dirty="0"/>
+          </a:p>
+          <a:p>
+            <a:pPr marL="285750" indent="-285750">
+              <a:buFont typeface="Arial" panose="020B0604020202020204" pitchFamily="34" charset="0"/>
+              <a:buChar char="•"/>
+            </a:pPr>
+            <a:r>
+              <a:rPr lang="ko-KR" altLang="en-US" dirty="0" err="1"/>
+              <a:t>하이퍼파라미터</a:t>
+            </a:r>
+            <a:r>
+              <a:rPr lang="ko-KR" altLang="en-US" dirty="0"/>
+              <a:t> </a:t>
+            </a:r>
+            <a:r>
+              <a:rPr lang="en-US" altLang="ko-KR" dirty="0"/>
+              <a:t>(</a:t>
+            </a:r>
+            <a:r>
+              <a:rPr lang="ko-KR" altLang="en-US" dirty="0"/>
+              <a:t>내가 정해주는 변수</a:t>
+            </a:r>
+            <a:r>
+              <a:rPr lang="en-US" altLang="ko-KR" dirty="0"/>
+              <a:t>)</a:t>
+            </a:r>
+          </a:p>
+          <a:p>
+            <a:pPr marL="742950" lvl="1" indent="-285750">
+              <a:buFont typeface="Arial" panose="020B0604020202020204" pitchFamily="34" charset="0"/>
+              <a:buChar char="•"/>
+            </a:pPr>
+            <a:r>
+              <a:rPr lang="en-US" altLang="ko-KR" dirty="0"/>
+              <a:t>Epoch, batch size</a:t>
+            </a:r>
+          </a:p>
+          <a:p>
+            <a:pPr marL="742950" lvl="1" indent="-285750">
+              <a:buFont typeface="Arial" panose="020B0604020202020204" pitchFamily="34" charset="0"/>
+              <a:buChar char="•"/>
+            </a:pPr>
+            <a:r>
+              <a:rPr lang="en-US" altLang="ko-KR" dirty="0"/>
+              <a:t>Initial weight </a:t>
+            </a:r>
+            <a:r>
+              <a:rPr lang="ko-KR" altLang="en-US" dirty="0"/>
+              <a:t>값</a:t>
+            </a:r>
+            <a:endParaRPr lang="en-US" altLang="ko-KR" dirty="0"/>
+          </a:p>
+          <a:p>
+            <a:pPr marL="742950" lvl="1" indent="-285750">
+              <a:buFont typeface="Arial" panose="020B0604020202020204" pitchFamily="34" charset="0"/>
+              <a:buChar char="•"/>
+            </a:pPr>
+            <a:r>
+              <a:rPr lang="en-US" altLang="ko-KR" dirty="0"/>
+              <a:t>Learning rate  learning rate scheduling</a:t>
+            </a:r>
+          </a:p>
+          <a:p>
+            <a:pPr marL="742950" lvl="1" indent="-285750">
+              <a:buFont typeface="Arial" panose="020B0604020202020204" pitchFamily="34" charset="0"/>
+              <a:buChar char="•"/>
+            </a:pPr>
+            <a:r>
+              <a:rPr lang="en-US" altLang="ko-KR" dirty="0"/>
+              <a:t>Model architecture (layer </a:t>
+            </a:r>
+            <a:r>
+              <a:rPr lang="ko-KR" altLang="en-US" dirty="0"/>
+              <a:t>수</a:t>
+            </a:r>
+            <a:r>
+              <a:rPr lang="en-US" altLang="ko-KR" dirty="0"/>
+              <a:t>, node </a:t>
+            </a:r>
+            <a:r>
+              <a:rPr lang="ko-KR" altLang="en-US" dirty="0"/>
+              <a:t>수</a:t>
+            </a:r>
+            <a:r>
+              <a:rPr lang="en-US" altLang="ko-KR" dirty="0"/>
+              <a:t>, activation </a:t>
+            </a:r>
+            <a:r>
+              <a:rPr lang="ko-KR" altLang="en-US" dirty="0"/>
+              <a:t>함수 등</a:t>
+            </a:r>
+            <a:r>
+              <a:rPr lang="en-US" altLang="ko-KR" dirty="0"/>
+              <a:t>..)</a:t>
+            </a:r>
+          </a:p>
+          <a:p>
+            <a:pPr marL="742950" lvl="1" indent="-285750">
+              <a:buFont typeface="Arial" panose="020B0604020202020204" pitchFamily="34" charset="0"/>
+              <a:buChar char="•"/>
+            </a:pPr>
+            <a:r>
+              <a:rPr lang="en-US" altLang="ko-KR" dirty="0"/>
+              <a:t>Loss </a:t>
+            </a:r>
+            <a:r>
+              <a:rPr lang="ko-KR" altLang="en-US" dirty="0"/>
+              <a:t>함수 뭐 쓸지</a:t>
+            </a:r>
+            <a:endParaRPr lang="en-US" altLang="ko-KR" dirty="0"/>
+          </a:p>
+          <a:p>
+            <a:pPr marL="742950" lvl="1" indent="-285750">
+              <a:buFont typeface="Arial" panose="020B0604020202020204" pitchFamily="34" charset="0"/>
+              <a:buChar char="•"/>
+            </a:pPr>
+            <a:r>
+              <a:rPr lang="ko-KR" altLang="en-US" dirty="0"/>
+              <a:t>최적화 기법 뭐 쓸지</a:t>
+            </a:r>
+          </a:p>
+        </p:txBody>
+      </p:sp>
+    </p:spTree>
+    <p:extLst>
+      <p:ext uri="{BB962C8B-B14F-4D97-AF65-F5344CB8AC3E}">
+        <p14:creationId xmlns:p14="http://schemas.microsoft.com/office/powerpoint/2010/main" val="3913564827"/>
+      </p:ext>
+    </p:extLst>
+  </p:cSld>
+  <p:clrMapOvr>
+    <a:masterClrMapping/>
+  </p:clrMapOvr>
+</p:sld>
+</file>
+
+<file path=ppt/slides/slide36.xml><?xml version="1.0" encoding="utf-8"?>
 <p:sld xmlns:a="http://schemas.openxmlformats.org/drawingml/2006/main" xmlns:r="http://schemas.openxmlformats.org/officeDocument/2006/relationships" xmlns:p="http://schemas.openxmlformats.org/presentationml/2006/main">
   <p:cSld>
     <p:spTree>
